--- a/search-engine/docs/Quickdex.pptx
+++ b/search-engine/docs/Quickdex.pptx
@@ -41,23 +41,28 @@
     <p:sldId id="286" r:id="rId36"/>
     <p:sldId id="287" r:id="rId37"/>
     <p:sldId id="288" r:id="rId38"/>
+    <p:sldId id="289" r:id="rId39"/>
+    <p:sldId id="290" r:id="rId40"/>
+    <p:sldId id="291" r:id="rId41"/>
+    <p:sldId id="292" r:id="rId42"/>
+    <p:sldId id="293" r:id="rId43"/>
   </p:sldIdLst>
   <p:sldSz cy="5143500" cx="9144000"/>
   <p:notesSz cx="6858000" cy="9144000"/>
   <p:embeddedFontLst>
     <p:embeddedFont>
       <p:font typeface="Economica"/>
-      <p:regular r:id="rId39"/>
-      <p:bold r:id="rId40"/>
-      <p:italic r:id="rId41"/>
-      <p:boldItalic r:id="rId42"/>
+      <p:regular r:id="rId44"/>
+      <p:bold r:id="rId45"/>
+      <p:italic r:id="rId46"/>
+      <p:boldItalic r:id="rId47"/>
     </p:embeddedFont>
     <p:embeddedFont>
       <p:font typeface="Open Sans"/>
-      <p:regular r:id="rId43"/>
-      <p:bold r:id="rId44"/>
-      <p:italic r:id="rId45"/>
-      <p:boldItalic r:id="rId46"/>
+      <p:regular r:id="rId48"/>
+      <p:bold r:id="rId49"/>
+      <p:italic r:id="rId50"/>
+      <p:boldItalic r:id="rId51"/>
     </p:embeddedFont>
   </p:embeddedFontLst>
   <p:defaultTextStyle>
@@ -1545,7 +1550,7 @@
       </p:grpSpPr>
       <p:sp>
         <p:nvSpPr>
-          <p:cNvPr id="195" name="Google Shape;195;h455a0c2c50cdc8_1_90:notes"/>
+          <p:cNvPr id="195" name="Google Shape;195;h455a0c2c50cdc8_1_406:notes"/>
           <p:cNvSpPr/>
           <p:nvPr>
             <p:ph idx="2" type="sldImg"/>
@@ -1580,7 +1585,7 @@
       </p:sp>
       <p:sp>
         <p:nvSpPr>
-          <p:cNvPr id="196" name="Google Shape;196;h455a0c2c50cdc8_1_90:notes"/>
+          <p:cNvPr id="196" name="Google Shape;196;h455a0c2c50cdc8_1_406:notes"/>
           <p:cNvSpPr txBox="1"/>
           <p:nvPr>
             <p:ph idx="1" type="body"/>
@@ -1644,7 +1649,7 @@
       </p:grpSpPr>
       <p:sp>
         <p:nvSpPr>
-          <p:cNvPr id="201" name="Google Shape;201;h455a0c2c50cdc8_1_391:notes"/>
+          <p:cNvPr id="201" name="Google Shape;201;h455a0c2c50cdc8_1_90:notes"/>
           <p:cNvSpPr/>
           <p:nvPr>
             <p:ph idx="2" type="sldImg"/>
@@ -1679,7 +1684,7 @@
       </p:sp>
       <p:sp>
         <p:nvSpPr>
-          <p:cNvPr id="202" name="Google Shape;202;h455a0c2c50cdc8_1_391:notes"/>
+          <p:cNvPr id="202" name="Google Shape;202;h455a0c2c50cdc8_1_90:notes"/>
           <p:cNvSpPr txBox="1"/>
           <p:nvPr>
             <p:ph idx="1" type="body"/>
@@ -1743,7 +1748,7 @@
       </p:grpSpPr>
       <p:sp>
         <p:nvSpPr>
-          <p:cNvPr id="207" name="Google Shape;207;h455a0c2c50cdc8_1_396:notes"/>
+          <p:cNvPr id="207" name="Google Shape;207;h455a0c2c50cdc8_1_391:notes"/>
           <p:cNvSpPr/>
           <p:nvPr>
             <p:ph idx="2" type="sldImg"/>
@@ -1778,7 +1783,7 @@
       </p:sp>
       <p:sp>
         <p:nvSpPr>
-          <p:cNvPr id="208" name="Google Shape;208;h455a0c2c50cdc8_1_396:notes"/>
+          <p:cNvPr id="208" name="Google Shape;208;h455a0c2c50cdc8_1_391:notes"/>
           <p:cNvSpPr txBox="1"/>
           <p:nvPr>
             <p:ph idx="1" type="body"/>
@@ -1941,7 +1946,7 @@
       </p:grpSpPr>
       <p:sp>
         <p:nvSpPr>
-          <p:cNvPr id="213" name="Google Shape;213;h455a0c2c50cdc8_1_401:notes"/>
+          <p:cNvPr id="213" name="Google Shape;213;h455a0c2c50cdc8_1_396:notes"/>
           <p:cNvSpPr/>
           <p:nvPr>
             <p:ph idx="2" type="sldImg"/>
@@ -1976,7 +1981,7 @@
       </p:sp>
       <p:sp>
         <p:nvSpPr>
-          <p:cNvPr id="214" name="Google Shape;214;h455a0c2c50cdc8_1_401:notes"/>
+          <p:cNvPr id="214" name="Google Shape;214;h455a0c2c50cdc8_1_396:notes"/>
           <p:cNvSpPr txBox="1"/>
           <p:nvPr>
             <p:ph idx="1" type="body"/>
@@ -2040,7 +2045,7 @@
       </p:grpSpPr>
       <p:sp>
         <p:nvSpPr>
-          <p:cNvPr id="219" name="Google Shape;219;h455a0c2c50cdc8_1_385:notes"/>
+          <p:cNvPr id="219" name="Google Shape;219;h455a0c2c50cdc8_1_401:notes"/>
           <p:cNvSpPr/>
           <p:nvPr>
             <p:ph idx="2" type="sldImg"/>
@@ -2075,7 +2080,7 @@
       </p:sp>
       <p:sp>
         <p:nvSpPr>
-          <p:cNvPr id="220" name="Google Shape;220;h455a0c2c50cdc8_1_385:notes"/>
+          <p:cNvPr id="220" name="Google Shape;220;h455a0c2c50cdc8_1_401:notes"/>
           <p:cNvSpPr txBox="1"/>
           <p:nvPr>
             <p:ph idx="1" type="body"/>
@@ -2125,7 +2130,7 @@
   <p:cSld>
     <p:spTree>
       <p:nvGrpSpPr>
-        <p:cNvPr id="225" name="Shape 225"/>
+        <p:cNvPr id="224" name="Shape 224"/>
         <p:cNvGrpSpPr/>
         <p:nvPr/>
       </p:nvGrpSpPr>
@@ -2139,7 +2144,7 @@
       </p:grpSpPr>
       <p:sp>
         <p:nvSpPr>
-          <p:cNvPr id="226" name="Google Shape;226;h455a0c2c50cdc8_1_406:notes"/>
+          <p:cNvPr id="225" name="Google Shape;225;h455a0c2c50cdc8_1_385:notes"/>
           <p:cNvSpPr/>
           <p:nvPr>
             <p:ph idx="2" type="sldImg"/>
@@ -2174,7 +2179,7 @@
       </p:sp>
       <p:sp>
         <p:nvSpPr>
-          <p:cNvPr id="227" name="Google Shape;227;h455a0c2c50cdc8_1_406:notes"/>
+          <p:cNvPr id="226" name="Google Shape;226;h455a0c2c50cdc8_1_385:notes"/>
           <p:cNvSpPr txBox="1"/>
           <p:nvPr>
             <p:ph idx="1" type="body"/>
@@ -2238,7 +2243,7 @@
       </p:grpSpPr>
       <p:sp>
         <p:nvSpPr>
-          <p:cNvPr id="232" name="Google Shape;232;h455a0c2c50cdc8_1_411:notes"/>
+          <p:cNvPr id="232" name="Google Shape;232;h455a0c2c50cdc8_1_504:notes"/>
           <p:cNvSpPr/>
           <p:nvPr>
             <p:ph idx="2" type="sldImg"/>
@@ -2273,7 +2278,7 @@
       </p:sp>
       <p:sp>
         <p:nvSpPr>
-          <p:cNvPr id="233" name="Google Shape;233;h455a0c2c50cdc8_1_411:notes"/>
+          <p:cNvPr id="233" name="Google Shape;233;h455a0c2c50cdc8_1_504:notes"/>
           <p:cNvSpPr txBox="1"/>
           <p:nvPr>
             <p:ph idx="1" type="body"/>
@@ -2337,7 +2342,7 @@
       </p:grpSpPr>
       <p:sp>
         <p:nvSpPr>
-          <p:cNvPr id="238" name="Google Shape;238;h455a0c2c50cdc8_1_416:notes"/>
+          <p:cNvPr id="238" name="Google Shape;238;h455a0c2c50cdc8_1_411:notes"/>
           <p:cNvSpPr/>
           <p:nvPr>
             <p:ph idx="2" type="sldImg"/>
@@ -2372,7 +2377,7 @@
       </p:sp>
       <p:sp>
         <p:nvSpPr>
-          <p:cNvPr id="239" name="Google Shape;239;h455a0c2c50cdc8_1_416:notes"/>
+          <p:cNvPr id="239" name="Google Shape;239;h455a0c2c50cdc8_1_411:notes"/>
           <p:cNvSpPr txBox="1"/>
           <p:nvPr>
             <p:ph idx="1" type="body"/>
@@ -2422,7 +2427,7 @@
   <p:cSld>
     <p:spTree>
       <p:nvGrpSpPr>
-        <p:cNvPr id="247" name="Shape 247"/>
+        <p:cNvPr id="243" name="Shape 243"/>
         <p:cNvGrpSpPr/>
         <p:nvPr/>
       </p:nvGrpSpPr>
@@ -2436,7 +2441,7 @@
       </p:grpSpPr>
       <p:sp>
         <p:nvSpPr>
-          <p:cNvPr id="248" name="Google Shape;248;h455a0c2c50cdc8_1_431:notes"/>
+          <p:cNvPr id="244" name="Google Shape;244;h455a0c2c50cdc8_1_416:notes"/>
           <p:cNvSpPr/>
           <p:nvPr>
             <p:ph idx="2" type="sldImg"/>
@@ -2471,7 +2476,7 @@
       </p:sp>
       <p:sp>
         <p:nvSpPr>
-          <p:cNvPr id="249" name="Google Shape;249;h455a0c2c50cdc8_1_431:notes"/>
+          <p:cNvPr id="245" name="Google Shape;245;h455a0c2c50cdc8_1_416:notes"/>
           <p:cNvSpPr txBox="1"/>
           <p:nvPr>
             <p:ph idx="1" type="body"/>
@@ -2521,7 +2526,7 @@
   <p:cSld>
     <p:spTree>
       <p:nvGrpSpPr>
-        <p:cNvPr id="257" name="Shape 257"/>
+        <p:cNvPr id="253" name="Shape 253"/>
         <p:cNvGrpSpPr/>
         <p:nvPr/>
       </p:nvGrpSpPr>
@@ -2535,7 +2540,7 @@
       </p:grpSpPr>
       <p:sp>
         <p:nvSpPr>
-          <p:cNvPr id="258" name="Google Shape;258;h455a0c2c50cdc8_1_458:notes"/>
+          <p:cNvPr id="254" name="Google Shape;254;h455a0c2c50cdc8_1_431:notes"/>
           <p:cNvSpPr/>
           <p:nvPr>
             <p:ph idx="2" type="sldImg"/>
@@ -2570,7 +2575,7 @@
       </p:sp>
       <p:sp>
         <p:nvSpPr>
-          <p:cNvPr id="259" name="Google Shape;259;h455a0c2c50cdc8_1_458:notes"/>
+          <p:cNvPr id="255" name="Google Shape;255;h455a0c2c50cdc8_1_431:notes"/>
           <p:cNvSpPr txBox="1"/>
           <p:nvPr>
             <p:ph idx="1" type="body"/>
@@ -2620,7 +2625,7 @@
   <p:cSld>
     <p:spTree>
       <p:nvGrpSpPr>
-        <p:cNvPr id="264" name="Shape 264"/>
+        <p:cNvPr id="263" name="Shape 263"/>
         <p:cNvGrpSpPr/>
         <p:nvPr/>
       </p:nvGrpSpPr>
@@ -2634,7 +2639,7 @@
       </p:grpSpPr>
       <p:sp>
         <p:nvSpPr>
-          <p:cNvPr id="265" name="Google Shape;265;h455a0c2c50cdc8_1_464:notes"/>
+          <p:cNvPr id="264" name="Google Shape;264;h455a0c2c50cdc8_1_458:notes"/>
           <p:cNvSpPr/>
           <p:nvPr>
             <p:ph idx="2" type="sldImg"/>
@@ -2669,7 +2674,7 @@
       </p:sp>
       <p:sp>
         <p:nvSpPr>
-          <p:cNvPr id="266" name="Google Shape;266;h455a0c2c50cdc8_1_464:notes"/>
+          <p:cNvPr id="265" name="Google Shape;265;h455a0c2c50cdc8_1_458:notes"/>
           <p:cNvSpPr txBox="1"/>
           <p:nvPr>
             <p:ph idx="1" type="body"/>
@@ -2719,7 +2724,7 @@
   <p:cSld>
     <p:spTree>
       <p:nvGrpSpPr>
-        <p:cNvPr id="271" name="Shape 271"/>
+        <p:cNvPr id="270" name="Shape 270"/>
         <p:cNvGrpSpPr/>
         <p:nvPr/>
       </p:nvGrpSpPr>
@@ -2733,7 +2738,7 @@
       </p:grpSpPr>
       <p:sp>
         <p:nvSpPr>
-          <p:cNvPr id="272" name="Google Shape;272;h455a0c2c50cdc8_1_470:notes"/>
+          <p:cNvPr id="271" name="Google Shape;271;h455a0c2c50cdc8_1_464:notes"/>
           <p:cNvSpPr/>
           <p:nvPr>
             <p:ph idx="2" type="sldImg"/>
@@ -2768,7 +2773,7 @@
       </p:sp>
       <p:sp>
         <p:nvSpPr>
-          <p:cNvPr id="273" name="Google Shape;273;h455a0c2c50cdc8_1_470:notes"/>
+          <p:cNvPr id="272" name="Google Shape;272;h455a0c2c50cdc8_1_464:notes"/>
           <p:cNvSpPr txBox="1"/>
           <p:nvPr>
             <p:ph idx="1" type="body"/>
@@ -2818,7 +2823,7 @@
   <p:cSld>
     <p:spTree>
       <p:nvGrpSpPr>
-        <p:cNvPr id="278" name="Shape 278"/>
+        <p:cNvPr id="277" name="Shape 277"/>
         <p:cNvGrpSpPr/>
         <p:nvPr/>
       </p:nvGrpSpPr>
@@ -2832,7 +2837,7 @@
       </p:grpSpPr>
       <p:sp>
         <p:nvSpPr>
-          <p:cNvPr id="279" name="Google Shape;279;h455a0c2c50cdc8_1_476:notes"/>
+          <p:cNvPr id="278" name="Google Shape;278;h455a0c2c50cdc8_1_470:notes"/>
           <p:cNvSpPr/>
           <p:nvPr>
             <p:ph idx="2" type="sldImg"/>
@@ -2867,7 +2872,7 @@
       </p:sp>
       <p:sp>
         <p:nvSpPr>
-          <p:cNvPr id="280" name="Google Shape;280;h455a0c2c50cdc8_1_476:notes"/>
+          <p:cNvPr id="279" name="Google Shape;279;h455a0c2c50cdc8_1_470:notes"/>
           <p:cNvSpPr txBox="1"/>
           <p:nvPr>
             <p:ph idx="1" type="body"/>
@@ -3016,7 +3021,7 @@
   <p:cSld>
     <p:spTree>
       <p:nvGrpSpPr>
-        <p:cNvPr id="285" name="Shape 285"/>
+        <p:cNvPr id="284" name="Shape 284"/>
         <p:cNvGrpSpPr/>
         <p:nvPr/>
       </p:nvGrpSpPr>
@@ -3030,7 +3035,7 @@
       </p:grpSpPr>
       <p:sp>
         <p:nvSpPr>
-          <p:cNvPr id="286" name="Google Shape;286;h455a0c2c50cdc8_1_375:notes"/>
+          <p:cNvPr id="285" name="Google Shape;285;h455a0c2c50cdc8_1_476:notes"/>
           <p:cNvSpPr/>
           <p:nvPr>
             <p:ph idx="2" type="sldImg"/>
@@ -3065,7 +3070,7 @@
       </p:sp>
       <p:sp>
         <p:nvSpPr>
-          <p:cNvPr id="287" name="Google Shape;287;h455a0c2c50cdc8_1_375:notes"/>
+          <p:cNvPr id="286" name="Google Shape;286;h455a0c2c50cdc8_1_476:notes"/>
           <p:cNvSpPr txBox="1"/>
           <p:nvPr>
             <p:ph idx="1" type="body"/>
@@ -3129,7 +3134,7 @@
       </p:grpSpPr>
       <p:sp>
         <p:nvSpPr>
-          <p:cNvPr id="292" name="Google Shape;292;h455a0c2c50cdc8_1_422:notes"/>
+          <p:cNvPr id="292" name="Google Shape;292;h455a0c2c50cdc8_1_375:notes"/>
           <p:cNvSpPr/>
           <p:nvPr>
             <p:ph idx="2" type="sldImg"/>
@@ -3164,7 +3169,7 @@
       </p:sp>
       <p:sp>
         <p:nvSpPr>
-          <p:cNvPr id="293" name="Google Shape;293;h455a0c2c50cdc8_1_422:notes"/>
+          <p:cNvPr id="293" name="Google Shape;293;h455a0c2c50cdc8_1_375:notes"/>
           <p:cNvSpPr txBox="1"/>
           <p:nvPr>
             <p:ph idx="1" type="body"/>
@@ -3228,7 +3233,7 @@
       </p:grpSpPr>
       <p:sp>
         <p:nvSpPr>
-          <p:cNvPr id="298" name="Google Shape;298;gf3a7cb7f01_3_38:notes"/>
+          <p:cNvPr id="298" name="Google Shape;298;h455a0c2c50cdc8_1_487:notes"/>
           <p:cNvSpPr/>
           <p:nvPr>
             <p:ph idx="2" type="sldImg"/>
@@ -3263,7 +3268,7 @@
       </p:sp>
       <p:sp>
         <p:nvSpPr>
-          <p:cNvPr id="299" name="Google Shape;299;gf3a7cb7f01_3_38:notes"/>
+          <p:cNvPr id="299" name="Google Shape;299;h455a0c2c50cdc8_1_487:notes"/>
           <p:cNvSpPr txBox="1"/>
           <p:nvPr>
             <p:ph idx="1" type="body"/>
@@ -3327,7 +3332,7 @@
       </p:grpSpPr>
       <p:sp>
         <p:nvSpPr>
-          <p:cNvPr id="304" name="Google Shape;304;g2780138b592_0_100:notes"/>
+          <p:cNvPr id="304" name="Google Shape;304;h455a0c2c50cdc8_1_492:notes"/>
           <p:cNvSpPr/>
           <p:nvPr>
             <p:ph idx="2" type="sldImg"/>
@@ -3362,7 +3367,502 @@
       </p:sp>
       <p:sp>
         <p:nvSpPr>
-          <p:cNvPr id="305" name="Google Shape;305;g2780138b592_0_100:notes"/>
+          <p:cNvPr id="305" name="Google Shape;305;h455a0c2c50cdc8_1_492:notes"/>
+          <p:cNvSpPr txBox="1"/>
+          <p:nvPr>
+            <p:ph idx="1" type="body"/>
+          </p:nvPr>
+        </p:nvSpPr>
+        <p:spPr>
+          <a:xfrm>
+            <a:off x="685800" y="4343400"/>
+            <a:ext cx="5486400" cy="4114800"/>
+          </a:xfrm>
+          <a:prstGeom prst="rect">
+            <a:avLst/>
+          </a:prstGeom>
+        </p:spPr>
+        <p:txBody>
+          <a:bodyPr anchorCtr="0" anchor="t" bIns="91425" lIns="91425" spcFirstLastPara="1" rIns="91425" wrap="square" tIns="91425">
+            <a:noAutofit/>
+          </a:bodyPr>
+          <a:lstStyle/>
+          <a:p>
+            <a:pPr indent="0" lvl="0" marL="0" rtl="0" algn="l">
+              <a:spcBef>
+                <a:spcPts val="0"/>
+              </a:spcBef>
+              <a:spcAft>
+                <a:spcPts val="0"/>
+              </a:spcAft>
+              <a:buNone/>
+            </a:pPr>
+            <a:r>
+              <a:t/>
+            </a:r>
+            <a:endParaRPr/>
+          </a:p>
+        </p:txBody>
+      </p:sp>
+    </p:spTree>
+  </p:cSld>
+  <p:clrMapOvr>
+    <a:masterClrMapping/>
+  </p:clrMapOvr>
+</p:notes>
+</file>
+
+<file path=ppt/notesSlides/notesSlide34.xml><?xml version="1.0" encoding="utf-8"?>
+<p:notes xmlns:a="http://schemas.openxmlformats.org/drawingml/2006/main" xmlns:r="http://schemas.openxmlformats.org/officeDocument/2006/relationships" xmlns:mc="http://schemas.openxmlformats.org/markup-compatibility/2006" xmlns:mv="urn:schemas-microsoft-com:mac:vml" xmlns:p="http://schemas.openxmlformats.org/presentationml/2006/main" xmlns:c="http://schemas.openxmlformats.org/drawingml/2006/chart" xmlns:dgm="http://schemas.openxmlformats.org/drawingml/2006/diagram" xmlns:o="urn:schemas-microsoft-com:office:office" xmlns:v="urn:schemas-microsoft-com:vml" xmlns:pvml="urn:schemas-microsoft-com:office:powerpoint" xmlns:com="http://schemas.openxmlformats.org/drawingml/2006/compatibility" xmlns:p14="http://schemas.microsoft.com/office/powerpoint/2010/main" xmlns:p15="http://schemas.microsoft.com/office/powerpoint/2012/main" xmlns:ahyp="http://schemas.microsoft.com/office/drawing/2018/hyperlinkcolor" showMasterPhAnim="0" showMasterSp="0">
+  <p:cSld>
+    <p:spTree>
+      <p:nvGrpSpPr>
+        <p:cNvPr id="309" name="Shape 309"/>
+        <p:cNvGrpSpPr/>
+        <p:nvPr/>
+      </p:nvGrpSpPr>
+      <p:grpSpPr>
+        <a:xfrm>
+          <a:off x="0" y="0"/>
+          <a:ext cx="0" cy="0"/>
+          <a:chOff x="0" y="0"/>
+          <a:chExt cx="0" cy="0"/>
+        </a:xfrm>
+      </p:grpSpPr>
+      <p:sp>
+        <p:nvSpPr>
+          <p:cNvPr id="310" name="Google Shape;310;h455a0c2c50cdc8_1_497:notes"/>
+          <p:cNvSpPr/>
+          <p:nvPr>
+            <p:ph idx="2" type="sldImg"/>
+          </p:nvPr>
+        </p:nvSpPr>
+        <p:spPr>
+          <a:xfrm>
+            <a:off x="381300" y="685800"/>
+            <a:ext cx="6096000" cy="3429000"/>
+          </a:xfrm>
+          <a:custGeom>
+            <a:rect b="b" l="l" r="r" t="t"/>
+            <a:pathLst>
+              <a:path extrusionOk="0" h="120000" w="120000">
+                <a:moveTo>
+                  <a:pt x="0" y="0"/>
+                </a:moveTo>
+                <a:lnTo>
+                  <a:pt x="120000" y="0"/>
+                </a:lnTo>
+                <a:lnTo>
+                  <a:pt x="120000" y="120000"/>
+                </a:lnTo>
+                <a:lnTo>
+                  <a:pt x="0" y="120000"/>
+                </a:lnTo>
+                <a:close/>
+              </a:path>
+            </a:pathLst>
+          </a:custGeom>
+        </p:spPr>
+      </p:sp>
+      <p:sp>
+        <p:nvSpPr>
+          <p:cNvPr id="311" name="Google Shape;311;h455a0c2c50cdc8_1_497:notes"/>
+          <p:cNvSpPr txBox="1"/>
+          <p:nvPr>
+            <p:ph idx="1" type="body"/>
+          </p:nvPr>
+        </p:nvSpPr>
+        <p:spPr>
+          <a:xfrm>
+            <a:off x="685800" y="4343400"/>
+            <a:ext cx="5486400" cy="4114800"/>
+          </a:xfrm>
+          <a:prstGeom prst="rect">
+            <a:avLst/>
+          </a:prstGeom>
+        </p:spPr>
+        <p:txBody>
+          <a:bodyPr anchorCtr="0" anchor="t" bIns="91425" lIns="91425" spcFirstLastPara="1" rIns="91425" wrap="square" tIns="91425">
+            <a:noAutofit/>
+          </a:bodyPr>
+          <a:lstStyle/>
+          <a:p>
+            <a:pPr indent="0" lvl="0" marL="0" rtl="0" algn="l">
+              <a:spcBef>
+                <a:spcPts val="0"/>
+              </a:spcBef>
+              <a:spcAft>
+                <a:spcPts val="0"/>
+              </a:spcAft>
+              <a:buNone/>
+            </a:pPr>
+            <a:r>
+              <a:t/>
+            </a:r>
+            <a:endParaRPr/>
+          </a:p>
+        </p:txBody>
+      </p:sp>
+    </p:spTree>
+  </p:cSld>
+  <p:clrMapOvr>
+    <a:masterClrMapping/>
+  </p:clrMapOvr>
+</p:notes>
+</file>
+
+<file path=ppt/notesSlides/notesSlide35.xml><?xml version="1.0" encoding="utf-8"?>
+<p:notes xmlns:a="http://schemas.openxmlformats.org/drawingml/2006/main" xmlns:r="http://schemas.openxmlformats.org/officeDocument/2006/relationships" xmlns:mc="http://schemas.openxmlformats.org/markup-compatibility/2006" xmlns:mv="urn:schemas-microsoft-com:mac:vml" xmlns:p="http://schemas.openxmlformats.org/presentationml/2006/main" xmlns:c="http://schemas.openxmlformats.org/drawingml/2006/chart" xmlns:dgm="http://schemas.openxmlformats.org/drawingml/2006/diagram" xmlns:o="urn:schemas-microsoft-com:office:office" xmlns:v="urn:schemas-microsoft-com:vml" xmlns:pvml="urn:schemas-microsoft-com:office:powerpoint" xmlns:com="http://schemas.openxmlformats.org/drawingml/2006/compatibility" xmlns:p14="http://schemas.microsoft.com/office/powerpoint/2010/main" xmlns:p15="http://schemas.microsoft.com/office/powerpoint/2012/main" xmlns:ahyp="http://schemas.microsoft.com/office/drawing/2018/hyperlinkcolor" showMasterPhAnim="0" showMasterSp="0">
+  <p:cSld>
+    <p:spTree>
+      <p:nvGrpSpPr>
+        <p:cNvPr id="317" name="Shape 317"/>
+        <p:cNvGrpSpPr/>
+        <p:nvPr/>
+      </p:nvGrpSpPr>
+      <p:grpSpPr>
+        <a:xfrm>
+          <a:off x="0" y="0"/>
+          <a:ext cx="0" cy="0"/>
+          <a:chOff x="0" y="0"/>
+          <a:chExt cx="0" cy="0"/>
+        </a:xfrm>
+      </p:grpSpPr>
+      <p:sp>
+        <p:nvSpPr>
+          <p:cNvPr id="318" name="Google Shape;318;h455a0c2c50cdc8_1_509:notes"/>
+          <p:cNvSpPr/>
+          <p:nvPr>
+            <p:ph idx="2" type="sldImg"/>
+          </p:nvPr>
+        </p:nvSpPr>
+        <p:spPr>
+          <a:xfrm>
+            <a:off x="381300" y="685800"/>
+            <a:ext cx="6096000" cy="3429000"/>
+          </a:xfrm>
+          <a:custGeom>
+            <a:rect b="b" l="l" r="r" t="t"/>
+            <a:pathLst>
+              <a:path extrusionOk="0" h="120000" w="120000">
+                <a:moveTo>
+                  <a:pt x="0" y="0"/>
+                </a:moveTo>
+                <a:lnTo>
+                  <a:pt x="120000" y="0"/>
+                </a:lnTo>
+                <a:lnTo>
+                  <a:pt x="120000" y="120000"/>
+                </a:lnTo>
+                <a:lnTo>
+                  <a:pt x="0" y="120000"/>
+                </a:lnTo>
+                <a:close/>
+              </a:path>
+            </a:pathLst>
+          </a:custGeom>
+        </p:spPr>
+      </p:sp>
+      <p:sp>
+        <p:nvSpPr>
+          <p:cNvPr id="319" name="Google Shape;319;h455a0c2c50cdc8_1_509:notes"/>
+          <p:cNvSpPr txBox="1"/>
+          <p:nvPr>
+            <p:ph idx="1" type="body"/>
+          </p:nvPr>
+        </p:nvSpPr>
+        <p:spPr>
+          <a:xfrm>
+            <a:off x="685800" y="4343400"/>
+            <a:ext cx="5486400" cy="4114800"/>
+          </a:xfrm>
+          <a:prstGeom prst="rect">
+            <a:avLst/>
+          </a:prstGeom>
+        </p:spPr>
+        <p:txBody>
+          <a:bodyPr anchorCtr="0" anchor="t" bIns="91425" lIns="91425" spcFirstLastPara="1" rIns="91425" wrap="square" tIns="91425">
+            <a:noAutofit/>
+          </a:bodyPr>
+          <a:lstStyle/>
+          <a:p>
+            <a:pPr indent="0" lvl="0" marL="0" rtl="0" algn="l">
+              <a:spcBef>
+                <a:spcPts val="0"/>
+              </a:spcBef>
+              <a:spcAft>
+                <a:spcPts val="0"/>
+              </a:spcAft>
+              <a:buNone/>
+            </a:pPr>
+            <a:r>
+              <a:t/>
+            </a:r>
+            <a:endParaRPr/>
+          </a:p>
+        </p:txBody>
+      </p:sp>
+    </p:spTree>
+  </p:cSld>
+  <p:clrMapOvr>
+    <a:masterClrMapping/>
+  </p:clrMapOvr>
+</p:notes>
+</file>
+
+<file path=ppt/notesSlides/notesSlide36.xml><?xml version="1.0" encoding="utf-8"?>
+<p:notes xmlns:a="http://schemas.openxmlformats.org/drawingml/2006/main" xmlns:r="http://schemas.openxmlformats.org/officeDocument/2006/relationships" xmlns:mc="http://schemas.openxmlformats.org/markup-compatibility/2006" xmlns:mv="urn:schemas-microsoft-com:mac:vml" xmlns:p="http://schemas.openxmlformats.org/presentationml/2006/main" xmlns:c="http://schemas.openxmlformats.org/drawingml/2006/chart" xmlns:dgm="http://schemas.openxmlformats.org/drawingml/2006/diagram" xmlns:o="urn:schemas-microsoft-com:office:office" xmlns:v="urn:schemas-microsoft-com:vml" xmlns:pvml="urn:schemas-microsoft-com:office:powerpoint" xmlns:com="http://schemas.openxmlformats.org/drawingml/2006/compatibility" xmlns:p14="http://schemas.microsoft.com/office/powerpoint/2010/main" xmlns:p15="http://schemas.microsoft.com/office/powerpoint/2012/main" xmlns:ahyp="http://schemas.microsoft.com/office/drawing/2018/hyperlinkcolor" showMasterPhAnim="0" showMasterSp="0">
+  <p:cSld>
+    <p:spTree>
+      <p:nvGrpSpPr>
+        <p:cNvPr id="323" name="Shape 323"/>
+        <p:cNvGrpSpPr/>
+        <p:nvPr/>
+      </p:nvGrpSpPr>
+      <p:grpSpPr>
+        <a:xfrm>
+          <a:off x="0" y="0"/>
+          <a:ext cx="0" cy="0"/>
+          <a:chOff x="0" y="0"/>
+          <a:chExt cx="0" cy="0"/>
+        </a:xfrm>
+      </p:grpSpPr>
+      <p:sp>
+        <p:nvSpPr>
+          <p:cNvPr id="324" name="Google Shape;324;h455a0c2c50cdc8_1_514:notes"/>
+          <p:cNvSpPr/>
+          <p:nvPr>
+            <p:ph idx="2" type="sldImg"/>
+          </p:nvPr>
+        </p:nvSpPr>
+        <p:spPr>
+          <a:xfrm>
+            <a:off x="381300" y="685800"/>
+            <a:ext cx="6096000" cy="3429000"/>
+          </a:xfrm>
+          <a:custGeom>
+            <a:rect b="b" l="l" r="r" t="t"/>
+            <a:pathLst>
+              <a:path extrusionOk="0" h="120000" w="120000">
+                <a:moveTo>
+                  <a:pt x="0" y="0"/>
+                </a:moveTo>
+                <a:lnTo>
+                  <a:pt x="120000" y="0"/>
+                </a:lnTo>
+                <a:lnTo>
+                  <a:pt x="120000" y="120000"/>
+                </a:lnTo>
+                <a:lnTo>
+                  <a:pt x="0" y="120000"/>
+                </a:lnTo>
+                <a:close/>
+              </a:path>
+            </a:pathLst>
+          </a:custGeom>
+        </p:spPr>
+      </p:sp>
+      <p:sp>
+        <p:nvSpPr>
+          <p:cNvPr id="325" name="Google Shape;325;h455a0c2c50cdc8_1_514:notes"/>
+          <p:cNvSpPr txBox="1"/>
+          <p:nvPr>
+            <p:ph idx="1" type="body"/>
+          </p:nvPr>
+        </p:nvSpPr>
+        <p:spPr>
+          <a:xfrm>
+            <a:off x="685800" y="4343400"/>
+            <a:ext cx="5486400" cy="4114800"/>
+          </a:xfrm>
+          <a:prstGeom prst="rect">
+            <a:avLst/>
+          </a:prstGeom>
+        </p:spPr>
+        <p:txBody>
+          <a:bodyPr anchorCtr="0" anchor="t" bIns="91425" lIns="91425" spcFirstLastPara="1" rIns="91425" wrap="square" tIns="91425">
+            <a:noAutofit/>
+          </a:bodyPr>
+          <a:lstStyle/>
+          <a:p>
+            <a:pPr indent="0" lvl="0" marL="0" rtl="0" algn="l">
+              <a:spcBef>
+                <a:spcPts val="0"/>
+              </a:spcBef>
+              <a:spcAft>
+                <a:spcPts val="0"/>
+              </a:spcAft>
+              <a:buNone/>
+            </a:pPr>
+            <a:r>
+              <a:t/>
+            </a:r>
+            <a:endParaRPr/>
+          </a:p>
+        </p:txBody>
+      </p:sp>
+    </p:spTree>
+  </p:cSld>
+  <p:clrMapOvr>
+    <a:masterClrMapping/>
+  </p:clrMapOvr>
+</p:notes>
+</file>
+
+<file path=ppt/notesSlides/notesSlide37.xml><?xml version="1.0" encoding="utf-8"?>
+<p:notes xmlns:a="http://schemas.openxmlformats.org/drawingml/2006/main" xmlns:r="http://schemas.openxmlformats.org/officeDocument/2006/relationships" xmlns:mc="http://schemas.openxmlformats.org/markup-compatibility/2006" xmlns:mv="urn:schemas-microsoft-com:mac:vml" xmlns:p="http://schemas.openxmlformats.org/presentationml/2006/main" xmlns:c="http://schemas.openxmlformats.org/drawingml/2006/chart" xmlns:dgm="http://schemas.openxmlformats.org/drawingml/2006/diagram" xmlns:o="urn:schemas-microsoft-com:office:office" xmlns:v="urn:schemas-microsoft-com:vml" xmlns:pvml="urn:schemas-microsoft-com:office:powerpoint" xmlns:com="http://schemas.openxmlformats.org/drawingml/2006/compatibility" xmlns:p14="http://schemas.microsoft.com/office/powerpoint/2010/main" xmlns:p15="http://schemas.microsoft.com/office/powerpoint/2012/main" xmlns:ahyp="http://schemas.microsoft.com/office/drawing/2018/hyperlinkcolor" showMasterPhAnim="0" showMasterSp="0">
+  <p:cSld>
+    <p:spTree>
+      <p:nvGrpSpPr>
+        <p:cNvPr id="329" name="Shape 329"/>
+        <p:cNvGrpSpPr/>
+        <p:nvPr/>
+      </p:nvGrpSpPr>
+      <p:grpSpPr>
+        <a:xfrm>
+          <a:off x="0" y="0"/>
+          <a:ext cx="0" cy="0"/>
+          <a:chOff x="0" y="0"/>
+          <a:chExt cx="0" cy="0"/>
+        </a:xfrm>
+      </p:grpSpPr>
+      <p:sp>
+        <p:nvSpPr>
+          <p:cNvPr id="330" name="Google Shape;330;gf3a7cb7f01_3_38:notes"/>
+          <p:cNvSpPr/>
+          <p:nvPr>
+            <p:ph idx="2" type="sldImg"/>
+          </p:nvPr>
+        </p:nvSpPr>
+        <p:spPr>
+          <a:xfrm>
+            <a:off x="381300" y="685800"/>
+            <a:ext cx="6096000" cy="3429000"/>
+          </a:xfrm>
+          <a:custGeom>
+            <a:rect b="b" l="l" r="r" t="t"/>
+            <a:pathLst>
+              <a:path extrusionOk="0" h="120000" w="120000">
+                <a:moveTo>
+                  <a:pt x="0" y="0"/>
+                </a:moveTo>
+                <a:lnTo>
+                  <a:pt x="120000" y="0"/>
+                </a:lnTo>
+                <a:lnTo>
+                  <a:pt x="120000" y="120000"/>
+                </a:lnTo>
+                <a:lnTo>
+                  <a:pt x="0" y="120000"/>
+                </a:lnTo>
+                <a:close/>
+              </a:path>
+            </a:pathLst>
+          </a:custGeom>
+        </p:spPr>
+      </p:sp>
+      <p:sp>
+        <p:nvSpPr>
+          <p:cNvPr id="331" name="Google Shape;331;gf3a7cb7f01_3_38:notes"/>
+          <p:cNvSpPr txBox="1"/>
+          <p:nvPr>
+            <p:ph idx="1" type="body"/>
+          </p:nvPr>
+        </p:nvSpPr>
+        <p:spPr>
+          <a:xfrm>
+            <a:off x="685800" y="4343400"/>
+            <a:ext cx="5486400" cy="4114800"/>
+          </a:xfrm>
+          <a:prstGeom prst="rect">
+            <a:avLst/>
+          </a:prstGeom>
+        </p:spPr>
+        <p:txBody>
+          <a:bodyPr anchorCtr="0" anchor="t" bIns="91425" lIns="91425" spcFirstLastPara="1" rIns="91425" wrap="square" tIns="91425">
+            <a:noAutofit/>
+          </a:bodyPr>
+          <a:lstStyle/>
+          <a:p>
+            <a:pPr indent="0" lvl="0" marL="0" rtl="0" algn="l">
+              <a:spcBef>
+                <a:spcPts val="0"/>
+              </a:spcBef>
+              <a:spcAft>
+                <a:spcPts val="0"/>
+              </a:spcAft>
+              <a:buNone/>
+            </a:pPr>
+            <a:r>
+              <a:t/>
+            </a:r>
+            <a:endParaRPr/>
+          </a:p>
+        </p:txBody>
+      </p:sp>
+    </p:spTree>
+  </p:cSld>
+  <p:clrMapOvr>
+    <a:masterClrMapping/>
+  </p:clrMapOvr>
+</p:notes>
+</file>
+
+<file path=ppt/notesSlides/notesSlide38.xml><?xml version="1.0" encoding="utf-8"?>
+<p:notes xmlns:a="http://schemas.openxmlformats.org/drawingml/2006/main" xmlns:r="http://schemas.openxmlformats.org/officeDocument/2006/relationships" xmlns:mc="http://schemas.openxmlformats.org/markup-compatibility/2006" xmlns:mv="urn:schemas-microsoft-com:mac:vml" xmlns:p="http://schemas.openxmlformats.org/presentationml/2006/main" xmlns:c="http://schemas.openxmlformats.org/drawingml/2006/chart" xmlns:dgm="http://schemas.openxmlformats.org/drawingml/2006/diagram" xmlns:o="urn:schemas-microsoft-com:office:office" xmlns:v="urn:schemas-microsoft-com:vml" xmlns:pvml="urn:schemas-microsoft-com:office:powerpoint" xmlns:com="http://schemas.openxmlformats.org/drawingml/2006/compatibility" xmlns:p14="http://schemas.microsoft.com/office/powerpoint/2010/main" xmlns:p15="http://schemas.microsoft.com/office/powerpoint/2012/main" xmlns:ahyp="http://schemas.microsoft.com/office/drawing/2018/hyperlinkcolor" showMasterPhAnim="0" showMasterSp="0">
+  <p:cSld>
+    <p:spTree>
+      <p:nvGrpSpPr>
+        <p:cNvPr id="335" name="Shape 335"/>
+        <p:cNvGrpSpPr/>
+        <p:nvPr/>
+      </p:nvGrpSpPr>
+      <p:grpSpPr>
+        <a:xfrm>
+          <a:off x="0" y="0"/>
+          <a:ext cx="0" cy="0"/>
+          <a:chOff x="0" y="0"/>
+          <a:chExt cx="0" cy="0"/>
+        </a:xfrm>
+      </p:grpSpPr>
+      <p:sp>
+        <p:nvSpPr>
+          <p:cNvPr id="336" name="Google Shape;336;g2780138b592_0_100:notes"/>
+          <p:cNvSpPr/>
+          <p:nvPr>
+            <p:ph idx="2" type="sldImg"/>
+          </p:nvPr>
+        </p:nvSpPr>
+        <p:spPr>
+          <a:xfrm>
+            <a:off x="381300" y="685800"/>
+            <a:ext cx="6096000" cy="3429000"/>
+          </a:xfrm>
+          <a:custGeom>
+            <a:rect b="b" l="l" r="r" t="t"/>
+            <a:pathLst>
+              <a:path extrusionOk="0" h="120000" w="120000">
+                <a:moveTo>
+                  <a:pt x="0" y="0"/>
+                </a:moveTo>
+                <a:lnTo>
+                  <a:pt x="120000" y="0"/>
+                </a:lnTo>
+                <a:lnTo>
+                  <a:pt x="120000" y="120000"/>
+                </a:lnTo>
+                <a:lnTo>
+                  <a:pt x="0" y="120000"/>
+                </a:lnTo>
+                <a:close/>
+              </a:path>
+            </a:pathLst>
+          </a:custGeom>
+        </p:spPr>
+      </p:sp>
+      <p:sp>
+        <p:nvSpPr>
+          <p:cNvPr id="337" name="Google Shape;337;g2780138b592_0_100:notes"/>
           <p:cNvSpPr txBox="1"/>
           <p:nvPr>
             <p:ph idx="1" type="body"/>
@@ -11843,13 +12343,13 @@
           <p:cNvPr id="198" name="Google Shape;198;p29"/>
           <p:cNvSpPr txBox="1"/>
           <p:nvPr>
-            <p:ph idx="12" type="sldNum"/>
+            <p:ph type="title"/>
           </p:nvPr>
         </p:nvSpPr>
         <p:spPr>
           <a:xfrm>
-            <a:off x="8472458" y="4663217"/>
-            <a:ext cx="548700" cy="393600"/>
+            <a:off x="773700" y="1806450"/>
+            <a:ext cx="7596600" cy="1530600"/>
           </a:xfrm>
           <a:prstGeom prst="rect">
             <a:avLst/>
@@ -11861,6 +12361,54 @@
           </a:bodyPr>
           <a:lstStyle/>
           <a:p>
+            <a:pPr indent="0" lvl="0" marL="0" rtl="0" algn="ctr">
+              <a:spcBef>
+                <a:spcPts val="0"/>
+              </a:spcBef>
+              <a:spcAft>
+                <a:spcPts val="0"/>
+              </a:spcAft>
+              <a:buNone/>
+            </a:pPr>
+            <a:r>
+              <a:rPr lang="en">
+                <a:solidFill>
+                  <a:schemeClr val="accent1"/>
+                </a:solidFill>
+              </a:rPr>
+              <a:t>Our updated design</a:t>
+            </a:r>
+            <a:endParaRPr b="1">
+              <a:solidFill>
+                <a:schemeClr val="accent1"/>
+              </a:solidFill>
+            </a:endParaRPr>
+          </a:p>
+        </p:txBody>
+      </p:sp>
+      <p:sp>
+        <p:nvSpPr>
+          <p:cNvPr id="199" name="Google Shape;199;p29"/>
+          <p:cNvSpPr txBox="1"/>
+          <p:nvPr>
+            <p:ph idx="12" type="sldNum"/>
+          </p:nvPr>
+        </p:nvSpPr>
+        <p:spPr>
+          <a:xfrm>
+            <a:off x="8472458" y="4663217"/>
+            <a:ext cx="548700" cy="393600"/>
+          </a:xfrm>
+          <a:prstGeom prst="rect">
+            <a:avLst/>
+          </a:prstGeom>
+        </p:spPr>
+        <p:txBody>
+          <a:bodyPr anchorCtr="0" anchor="ctr" bIns="91425" lIns="91425" spcFirstLastPara="1" rIns="91425" wrap="square" tIns="91425">
+            <a:normAutofit/>
+          </a:bodyPr>
+          <a:lstStyle/>
+          <a:p>
             <a:pPr indent="0" lvl="0" marL="0" rtl="0" algn="r">
               <a:spcBef>
                 <a:spcPts val="0"/>
@@ -11878,33 +12426,6 @@
           </a:p>
         </p:txBody>
       </p:sp>
-      <p:pic>
-        <p:nvPicPr>
-          <p:cNvPr id="199" name="Google Shape;199;p29" title="QuickdexDesign.png"/>
-          <p:cNvPicPr preferRelativeResize="0"/>
-          <p:nvPr/>
-        </p:nvPicPr>
-        <p:blipFill rotWithShape="1">
-          <a:blip r:embed="rId3">
-            <a:alphaModFix/>
-          </a:blip>
-          <a:srcRect b="0" l="219" r="219" t="0"/>
-          <a:stretch/>
-        </p:blipFill>
-        <p:spPr>
-          <a:xfrm>
-            <a:off x="578925" y="777988"/>
-            <a:ext cx="7986150" cy="3587523"/>
-          </a:xfrm>
-          <a:prstGeom prst="rect">
-            <a:avLst/>
-          </a:prstGeom>
-          <a:noFill/>
-          <a:ln>
-            <a:noFill/>
-          </a:ln>
-        </p:spPr>
-      </p:pic>
     </p:spTree>
   </p:cSld>
   <p:clrMapOvr>
@@ -11935,126 +12456,6 @@
           <p:cNvPr id="204" name="Google Shape;204;p30"/>
           <p:cNvSpPr txBox="1"/>
           <p:nvPr>
-            <p:ph type="title"/>
-          </p:nvPr>
-        </p:nvSpPr>
-        <p:spPr>
-          <a:xfrm>
-            <a:off x="773700" y="1806450"/>
-            <a:ext cx="7596600" cy="1530600"/>
-          </a:xfrm>
-          <a:prstGeom prst="rect">
-            <a:avLst/>
-          </a:prstGeom>
-        </p:spPr>
-        <p:txBody>
-          <a:bodyPr anchorCtr="0" anchor="ctr" bIns="91425" lIns="91425" spcFirstLastPara="1" rIns="91425" wrap="square" tIns="91425">
-            <a:normAutofit fontScale="90000"/>
-          </a:bodyPr>
-          <a:lstStyle/>
-          <a:p>
-            <a:pPr indent="0" lvl="0" marL="0" rtl="0" algn="ctr">
-              <a:spcBef>
-                <a:spcPts val="0"/>
-              </a:spcBef>
-              <a:spcAft>
-                <a:spcPts val="0"/>
-              </a:spcAft>
-              <a:buNone/>
-            </a:pPr>
-            <a:r>
-              <a:rPr lang="en">
-                <a:solidFill>
-                  <a:schemeClr val="accent1"/>
-                </a:solidFill>
-              </a:rPr>
-              <a:t>We have defined the </a:t>
-            </a:r>
-            <a:r>
-              <a:rPr b="1" lang="en">
-                <a:solidFill>
-                  <a:schemeClr val="accent1"/>
-                </a:solidFill>
-              </a:rPr>
-              <a:t>Architectural Style</a:t>
-            </a:r>
-            <a:endParaRPr b="1">
-              <a:solidFill>
-                <a:schemeClr val="accent1"/>
-              </a:solidFill>
-            </a:endParaRPr>
-          </a:p>
-          <a:p>
-            <a:pPr indent="0" lvl="0" marL="0" rtl="0" algn="ctr">
-              <a:spcBef>
-                <a:spcPts val="0"/>
-              </a:spcBef>
-              <a:spcAft>
-                <a:spcPts val="0"/>
-              </a:spcAft>
-              <a:buNone/>
-            </a:pPr>
-            <a:r>
-              <a:rPr lang="en">
-                <a:solidFill>
-                  <a:schemeClr val="lt1"/>
-                </a:solidFill>
-              </a:rPr>
-              <a:t>And also the </a:t>
-            </a:r>
-            <a:r>
-              <a:rPr b="1" lang="en">
-                <a:solidFill>
-                  <a:schemeClr val="lt1"/>
-                </a:solidFill>
-              </a:rPr>
-              <a:t>Components and Connectors</a:t>
-            </a:r>
-            <a:endParaRPr b="1">
-              <a:solidFill>
-                <a:schemeClr val="lt1"/>
-              </a:solidFill>
-            </a:endParaRPr>
-          </a:p>
-          <a:p>
-            <a:pPr indent="0" lvl="0" marL="0" rtl="0" algn="ctr">
-              <a:spcBef>
-                <a:spcPts val="0"/>
-              </a:spcBef>
-              <a:spcAft>
-                <a:spcPts val="0"/>
-              </a:spcAft>
-              <a:buNone/>
-            </a:pPr>
-            <a:r>
-              <a:rPr lang="en">
-                <a:solidFill>
-                  <a:schemeClr val="lt1"/>
-                </a:solidFill>
-              </a:rPr>
-              <a:t>Now we need to define the </a:t>
-            </a:r>
-            <a:r>
-              <a:rPr b="1" lang="en">
-                <a:solidFill>
-                  <a:schemeClr val="lt1"/>
-                </a:solidFill>
-              </a:rPr>
-              <a:t>Constraints</a:t>
-            </a:r>
-            <a:endParaRPr b="1">
-              <a:solidFill>
-                <a:schemeClr val="lt1"/>
-              </a:solidFill>
-            </a:endParaRPr>
-          </a:p>
-        </p:txBody>
-      </p:sp>
-      <p:sp>
-        <p:nvSpPr>
-          <p:cNvPr id="205" name="Google Shape;205;p30"/>
-          <p:cNvSpPr txBox="1"/>
-          <p:nvPr>
             <p:ph idx="12" type="sldNum"/>
           </p:nvPr>
         </p:nvSpPr>
@@ -12090,6 +12491,33 @@
           </a:p>
         </p:txBody>
       </p:sp>
+      <p:pic>
+        <p:nvPicPr>
+          <p:cNvPr id="205" name="Google Shape;205;p30" title="QuickdexDesign.png"/>
+          <p:cNvPicPr preferRelativeResize="0"/>
+          <p:nvPr/>
+        </p:nvPicPr>
+        <p:blipFill rotWithShape="1">
+          <a:blip r:embed="rId3">
+            <a:alphaModFix/>
+          </a:blip>
+          <a:srcRect b="0" l="219" r="219" t="0"/>
+          <a:stretch/>
+        </p:blipFill>
+        <p:spPr>
+          <a:xfrm>
+            <a:off x="578925" y="777988"/>
+            <a:ext cx="7986150" cy="3587523"/>
+          </a:xfrm>
+          <a:prstGeom prst="rect">
+            <a:avLst/>
+          </a:prstGeom>
+          <a:noFill/>
+          <a:ln>
+            <a:noFill/>
+          </a:ln>
+        </p:spPr>
+      </p:pic>
     </p:spTree>
   </p:cSld>
   <p:clrMapOvr>
@@ -12182,7 +12610,7 @@
             <a:r>
               <a:rPr lang="en">
                 <a:solidFill>
-                  <a:schemeClr val="accent1"/>
+                  <a:schemeClr val="lt1"/>
                 </a:solidFill>
               </a:rPr>
               <a:t>And also the </a:t>
@@ -12190,14 +12618,14 @@
             <a:r>
               <a:rPr b="1" lang="en">
                 <a:solidFill>
-                  <a:schemeClr val="accent1"/>
+                  <a:schemeClr val="lt1"/>
                 </a:solidFill>
               </a:rPr>
               <a:t>Components and Connectors</a:t>
             </a:r>
             <a:endParaRPr b="1">
               <a:solidFill>
-                <a:schemeClr val="accent1"/>
+                <a:schemeClr val="lt1"/>
               </a:solidFill>
             </a:endParaRPr>
           </a:p>
@@ -12536,7 +12964,7 @@
             <a:r>
               <a:rPr lang="en">
                 <a:solidFill>
-                  <a:schemeClr val="accent1"/>
+                  <a:schemeClr val="lt1"/>
                 </a:solidFill>
               </a:rPr>
               <a:t>Now we need to define the </a:t>
@@ -12544,14 +12972,14 @@
             <a:r>
               <a:rPr b="1" lang="en">
                 <a:solidFill>
-                  <a:schemeClr val="accent1"/>
+                  <a:schemeClr val="lt1"/>
                 </a:solidFill>
               </a:rPr>
               <a:t>Constraints</a:t>
             </a:r>
             <a:endParaRPr b="1">
               <a:solidFill>
-                <a:schemeClr val="accent1"/>
+                <a:schemeClr val="lt1"/>
               </a:solidFill>
             </a:endParaRPr>
           </a:p>
@@ -12632,20 +13060,20 @@
         </p:nvSpPr>
         <p:spPr>
           <a:xfrm>
-            <a:off x="311700" y="315925"/>
-            <a:ext cx="8520600" cy="831300"/>
+            <a:off x="773700" y="1806450"/>
+            <a:ext cx="7596600" cy="1530600"/>
           </a:xfrm>
           <a:prstGeom prst="rect">
             <a:avLst/>
           </a:prstGeom>
         </p:spPr>
         <p:txBody>
-          <a:bodyPr anchorCtr="0" anchor="b" bIns="91425" lIns="91425" spcFirstLastPara="1" rIns="91425" wrap="square" tIns="91425">
-            <a:normAutofit/>
+          <a:bodyPr anchorCtr="0" anchor="ctr" bIns="91425" lIns="91425" spcFirstLastPara="1" rIns="91425" wrap="square" tIns="91425">
+            <a:normAutofit fontScale="90000"/>
           </a:bodyPr>
           <a:lstStyle/>
           <a:p>
-            <a:pPr indent="0" lvl="0" marL="0" rtl="0" algn="l">
+            <a:pPr indent="0" lvl="0" marL="0" rtl="0" algn="ctr">
               <a:spcBef>
                 <a:spcPts val="0"/>
               </a:spcBef>
@@ -12660,62 +13088,15 @@
                   <a:schemeClr val="accent1"/>
                 </a:solidFill>
               </a:rPr>
-              <a:t>Constraints</a:t>
-            </a:r>
-            <a:endParaRPr>
-              <a:solidFill>
-                <a:schemeClr val="accent1"/>
-              </a:solidFill>
-            </a:endParaRPr>
-          </a:p>
-        </p:txBody>
-      </p:sp>
-      <p:sp>
-        <p:nvSpPr>
-          <p:cNvPr id="223" name="Google Shape;223;p33"/>
-          <p:cNvSpPr txBox="1"/>
-          <p:nvPr>
-            <p:ph idx="1" type="body"/>
-          </p:nvPr>
-        </p:nvSpPr>
-        <p:spPr>
-          <a:xfrm>
-            <a:off x="311700" y="1225225"/>
-            <a:ext cx="8272200" cy="3577200"/>
-          </a:xfrm>
-          <a:prstGeom prst="rect">
-            <a:avLst/>
-          </a:prstGeom>
-        </p:spPr>
-        <p:txBody>
-          <a:bodyPr anchorCtr="0" anchor="t" bIns="91425" lIns="91425" spcFirstLastPara="1" rIns="91425" wrap="square" tIns="91425">
-            <a:normAutofit lnSpcReduction="20000"/>
-          </a:bodyPr>
-          <a:lstStyle/>
-          <a:p>
-            <a:pPr indent="-342900" lvl="0" marL="457200" rtl="0" algn="l">
-              <a:lnSpc>
-                <a:spcPct val="200000"/>
-              </a:lnSpc>
-              <a:spcBef>
-                <a:spcPts val="0"/>
-              </a:spcBef>
-              <a:spcAft>
-                <a:spcPts val="0"/>
-              </a:spcAft>
-              <a:buClr>
-                <a:schemeClr val="accent1"/>
-              </a:buClr>
-              <a:buSzPts val="1800"/>
-              <a:buChar char="●"/>
-            </a:pPr>
+              <a:t>We have defined the </a:t>
+            </a:r>
             <a:r>
               <a:rPr b="1" lang="en">
                 <a:solidFill>
                   <a:schemeClr val="accent1"/>
                 </a:solidFill>
               </a:rPr>
-              <a:t>Incremental Processing</a:t>
+              <a:t>Architectural Style</a:t>
             </a:r>
             <a:endParaRPr b="1">
               <a:solidFill>
@@ -12724,21 +13105,14 @@
             </a:endParaRPr>
           </a:p>
           <a:p>
-            <a:pPr indent="-317500" lvl="1" marL="914400" rtl="0" algn="l">
-              <a:lnSpc>
-                <a:spcPct val="200000"/>
-              </a:lnSpc>
-              <a:spcBef>
-                <a:spcPts val="0"/>
-              </a:spcBef>
-              <a:spcAft>
-                <a:spcPts val="0"/>
-              </a:spcAft>
-              <a:buClr>
-                <a:schemeClr val="accent1"/>
-              </a:buClr>
-              <a:buSzPts val="1400"/>
-              <a:buChar char="○"/>
+            <a:pPr indent="0" lvl="0" marL="0" rtl="0" algn="ctr">
+              <a:spcBef>
+                <a:spcPts val="0"/>
+              </a:spcBef>
+              <a:spcAft>
+                <a:spcPts val="0"/>
+              </a:spcAft>
+              <a:buNone/>
             </a:pPr>
             <a:r>
               <a:rPr lang="en">
@@ -12746,38 +13120,15 @@
                   <a:schemeClr val="accent1"/>
                 </a:solidFill>
               </a:rPr>
-              <a:t>Processing must happen one line at a time.</a:t>
-            </a:r>
-            <a:endParaRPr>
-              <a:solidFill>
-                <a:schemeClr val="accent1"/>
-              </a:solidFill>
-            </a:endParaRPr>
-          </a:p>
-          <a:p>
-            <a:pPr indent="-342900" lvl="0" marL="457200" rtl="0" algn="l">
-              <a:lnSpc>
-                <a:spcPct val="200000"/>
-              </a:lnSpc>
-              <a:spcBef>
-                <a:spcPts val="0"/>
-              </a:spcBef>
-              <a:spcAft>
-                <a:spcPts val="0"/>
-              </a:spcAft>
-              <a:buClr>
-                <a:schemeClr val="accent1"/>
-              </a:buClr>
-              <a:buSzPts val="1800"/>
-              <a:buChar char="●"/>
-            </a:pPr>
+              <a:t>And also the </a:t>
+            </a:r>
             <a:r>
               <a:rPr b="1" lang="en">
                 <a:solidFill>
                   <a:schemeClr val="accent1"/>
                 </a:solidFill>
               </a:rPr>
-              <a:t>Incremental Merge</a:t>
+              <a:t>Components and Connectors</a:t>
             </a:r>
             <a:endParaRPr b="1">
               <a:solidFill>
@@ -12786,21 +13137,14 @@
             </a:endParaRPr>
           </a:p>
           <a:p>
-            <a:pPr indent="-317500" lvl="1" marL="914400" rtl="0" algn="l">
-              <a:lnSpc>
-                <a:spcPct val="200000"/>
-              </a:lnSpc>
-              <a:spcBef>
-                <a:spcPts val="0"/>
-              </a:spcBef>
-              <a:spcAft>
-                <a:spcPts val="0"/>
-              </a:spcAft>
-              <a:buClr>
-                <a:schemeClr val="accent1"/>
-              </a:buClr>
-              <a:buSzPts val="1400"/>
-              <a:buChar char="○"/>
+            <a:pPr indent="0" lvl="0" marL="0" rtl="0" algn="ctr">
+              <a:spcBef>
+                <a:spcPts val="0"/>
+              </a:spcBef>
+              <a:spcAft>
+                <a:spcPts val="0"/>
+              </a:spcAft>
+              <a:buNone/>
             </a:pPr>
             <a:r>
               <a:rPr lang="en">
@@ -12808,38 +13152,15 @@
                   <a:schemeClr val="accent1"/>
                 </a:solidFill>
               </a:rPr>
-              <a:t>Must retain previous alphabetized shifts and merge them with the current line's shifts.</a:t>
-            </a:r>
-            <a:endParaRPr>
-              <a:solidFill>
-                <a:schemeClr val="accent1"/>
-              </a:solidFill>
-            </a:endParaRPr>
-          </a:p>
-          <a:p>
-            <a:pPr indent="-342900" lvl="0" marL="457200" rtl="0" algn="l">
-              <a:lnSpc>
-                <a:spcPct val="200000"/>
-              </a:lnSpc>
-              <a:spcBef>
-                <a:spcPts val="0"/>
-              </a:spcBef>
-              <a:spcAft>
-                <a:spcPts val="0"/>
-              </a:spcAft>
-              <a:buClr>
-                <a:schemeClr val="accent1"/>
-              </a:buClr>
-              <a:buSzPts val="1800"/>
-              <a:buChar char="●"/>
-            </a:pPr>
+              <a:t>Now we need to define the </a:t>
+            </a:r>
             <a:r>
               <a:rPr b="1" lang="en">
                 <a:solidFill>
                   <a:schemeClr val="accent1"/>
                 </a:solidFill>
               </a:rPr>
-              <a:t>Output Timing</a:t>
+              <a:t>Constraints</a:t>
             </a:r>
             <a:endParaRPr b="1">
               <a:solidFill>
@@ -12847,104 +13168,11 @@
               </a:solidFill>
             </a:endParaRPr>
           </a:p>
-          <a:p>
-            <a:pPr indent="-317500" lvl="1" marL="914400" rtl="0" algn="l">
-              <a:lnSpc>
-                <a:spcPct val="200000"/>
-              </a:lnSpc>
-              <a:spcBef>
-                <a:spcPts val="0"/>
-              </a:spcBef>
-              <a:spcAft>
-                <a:spcPts val="0"/>
-              </a:spcAft>
-              <a:buClr>
-                <a:schemeClr val="accent1"/>
-              </a:buClr>
-              <a:buSzPts val="1400"/>
-              <a:buChar char="○"/>
-            </a:pPr>
-            <a:r>
-              <a:rPr lang="en">
-                <a:solidFill>
-                  <a:schemeClr val="accent1"/>
-                </a:solidFill>
-              </a:rPr>
-              <a:t>Output keeps updating based on incremental processing</a:t>
-            </a:r>
-            <a:endParaRPr>
-              <a:solidFill>
-                <a:schemeClr val="accent1"/>
-              </a:solidFill>
-            </a:endParaRPr>
-          </a:p>
-          <a:p>
-            <a:pPr indent="-342900" lvl="0" marL="457200" rtl="0" algn="l">
-              <a:lnSpc>
-                <a:spcPct val="200000"/>
-              </a:lnSpc>
-              <a:spcBef>
-                <a:spcPts val="0"/>
-              </a:spcBef>
-              <a:spcAft>
-                <a:spcPts val="0"/>
-              </a:spcAft>
-              <a:buClr>
-                <a:schemeClr val="accent1"/>
-              </a:buClr>
-              <a:buSzPts val="1800"/>
-              <a:buChar char="●"/>
-            </a:pPr>
-            <a:r>
-              <a:rPr b="1" lang="en" sz="1800">
-                <a:solidFill>
-                  <a:schemeClr val="accent1"/>
-                </a:solidFill>
-              </a:rPr>
-              <a:t>Information Hiding</a:t>
-            </a:r>
-            <a:endParaRPr b="1" sz="1800">
-              <a:solidFill>
-                <a:schemeClr val="accent1"/>
-              </a:solidFill>
-            </a:endParaRPr>
-          </a:p>
-          <a:p>
-            <a:pPr indent="-317500" lvl="1" marL="914400" rtl="0" algn="l">
-              <a:lnSpc>
-                <a:spcPct val="200000"/>
-              </a:lnSpc>
-              <a:spcBef>
-                <a:spcPts val="0"/>
-              </a:spcBef>
-              <a:spcAft>
-                <a:spcPts val="0"/>
-              </a:spcAft>
-              <a:buClr>
-                <a:schemeClr val="accent1"/>
-              </a:buClr>
-              <a:buSzPts val="1400"/>
-              <a:buChar char="○"/>
-            </a:pPr>
-            <a:r>
-              <a:rPr lang="en">
-                <a:solidFill>
-                  <a:schemeClr val="accent1"/>
-                </a:solidFill>
-              </a:rPr>
-              <a:t>Each component exposes (public) only the operations required by other components.</a:t>
-            </a:r>
-            <a:endParaRPr>
-              <a:solidFill>
-                <a:schemeClr val="accent1"/>
-              </a:solidFill>
-            </a:endParaRPr>
-          </a:p>
         </p:txBody>
       </p:sp>
       <p:sp>
         <p:nvSpPr>
-          <p:cNvPr id="224" name="Google Shape;224;p33"/>
+          <p:cNvPr id="223" name="Google Shape;223;p33"/>
           <p:cNvSpPr txBox="1"/>
           <p:nvPr>
             <p:ph idx="12" type="sldNum"/>
@@ -12995,7 +13223,7 @@
   <p:cSld>
     <p:spTree>
       <p:nvGrpSpPr>
-        <p:cNvPr id="228" name="Shape 228"/>
+        <p:cNvPr id="227" name="Shape 227"/>
         <p:cNvGrpSpPr/>
         <p:nvPr/>
       </p:nvGrpSpPr>
@@ -13009,7 +13237,7 @@
       </p:grpSpPr>
       <p:sp>
         <p:nvSpPr>
-          <p:cNvPr id="229" name="Google Shape;229;p34"/>
+          <p:cNvPr id="228" name="Google Shape;228;p34"/>
           <p:cNvSpPr txBox="1"/>
           <p:nvPr>
             <p:ph type="title"/>
@@ -13017,20 +13245,20 @@
         </p:nvSpPr>
         <p:spPr>
           <a:xfrm>
-            <a:off x="773700" y="1806450"/>
-            <a:ext cx="7596600" cy="1530600"/>
+            <a:off x="311700" y="315925"/>
+            <a:ext cx="8520600" cy="831300"/>
           </a:xfrm>
           <a:prstGeom prst="rect">
             <a:avLst/>
           </a:prstGeom>
         </p:spPr>
         <p:txBody>
-          <a:bodyPr anchorCtr="0" anchor="ctr" bIns="91425" lIns="91425" spcFirstLastPara="1" rIns="91425" wrap="square" tIns="91425">
+          <a:bodyPr anchorCtr="0" anchor="b" bIns="91425" lIns="91425" spcFirstLastPara="1" rIns="91425" wrap="square" tIns="91425">
             <a:normAutofit/>
           </a:bodyPr>
           <a:lstStyle/>
           <a:p>
-            <a:pPr indent="0" lvl="0" marL="0" rtl="0" algn="ctr">
+            <a:pPr indent="0" lvl="0" marL="0" rtl="0" algn="l">
               <a:spcBef>
                 <a:spcPts val="0"/>
               </a:spcBef>
@@ -13045,9 +13273,281 @@
                   <a:schemeClr val="accent1"/>
                 </a:solidFill>
               </a:rPr>
-              <a:t>Now we talk about the most important part</a:t>
+              <a:t>Constraints</a:t>
+            </a:r>
+            <a:endParaRPr>
+              <a:solidFill>
+                <a:schemeClr val="accent1"/>
+              </a:solidFill>
+            </a:endParaRPr>
+          </a:p>
+        </p:txBody>
+      </p:sp>
+      <p:sp>
+        <p:nvSpPr>
+          <p:cNvPr id="229" name="Google Shape;229;p34"/>
+          <p:cNvSpPr txBox="1"/>
+          <p:nvPr>
+            <p:ph idx="1" type="body"/>
+          </p:nvPr>
+        </p:nvSpPr>
+        <p:spPr>
+          <a:xfrm>
+            <a:off x="311700" y="1225225"/>
+            <a:ext cx="8272200" cy="3577200"/>
+          </a:xfrm>
+          <a:prstGeom prst="rect">
+            <a:avLst/>
+          </a:prstGeom>
+        </p:spPr>
+        <p:txBody>
+          <a:bodyPr anchorCtr="0" anchor="t" bIns="91425" lIns="91425" spcFirstLastPara="1" rIns="91425" wrap="square" tIns="91425">
+            <a:normAutofit lnSpcReduction="20000"/>
+          </a:bodyPr>
+          <a:lstStyle/>
+          <a:p>
+            <a:pPr indent="-342900" lvl="0" marL="457200" rtl="0" algn="l">
+              <a:lnSpc>
+                <a:spcPct val="200000"/>
+              </a:lnSpc>
+              <a:spcBef>
+                <a:spcPts val="0"/>
+              </a:spcBef>
+              <a:spcAft>
+                <a:spcPts val="0"/>
+              </a:spcAft>
+              <a:buClr>
+                <a:schemeClr val="accent1"/>
+              </a:buClr>
+              <a:buSzPts val="1800"/>
+              <a:buChar char="●"/>
+            </a:pPr>
+            <a:r>
+              <a:rPr b="1" lang="en">
+                <a:solidFill>
+                  <a:schemeClr val="accent1"/>
+                </a:solidFill>
+              </a:rPr>
+              <a:t>Incremental Processing</a:t>
             </a:r>
             <a:endParaRPr b="1">
+              <a:solidFill>
+                <a:schemeClr val="accent1"/>
+              </a:solidFill>
+            </a:endParaRPr>
+          </a:p>
+          <a:p>
+            <a:pPr indent="-317500" lvl="1" marL="914400" rtl="0" algn="l">
+              <a:lnSpc>
+                <a:spcPct val="200000"/>
+              </a:lnSpc>
+              <a:spcBef>
+                <a:spcPts val="0"/>
+              </a:spcBef>
+              <a:spcAft>
+                <a:spcPts val="0"/>
+              </a:spcAft>
+              <a:buClr>
+                <a:schemeClr val="accent1"/>
+              </a:buClr>
+              <a:buSzPts val="1400"/>
+              <a:buChar char="○"/>
+            </a:pPr>
+            <a:r>
+              <a:rPr lang="en">
+                <a:solidFill>
+                  <a:schemeClr val="accent1"/>
+                </a:solidFill>
+              </a:rPr>
+              <a:t>Processing must happen one line at a time.</a:t>
+            </a:r>
+            <a:endParaRPr>
+              <a:solidFill>
+                <a:schemeClr val="accent1"/>
+              </a:solidFill>
+            </a:endParaRPr>
+          </a:p>
+          <a:p>
+            <a:pPr indent="-342900" lvl="0" marL="457200" rtl="0" algn="l">
+              <a:lnSpc>
+                <a:spcPct val="200000"/>
+              </a:lnSpc>
+              <a:spcBef>
+                <a:spcPts val="0"/>
+              </a:spcBef>
+              <a:spcAft>
+                <a:spcPts val="0"/>
+              </a:spcAft>
+              <a:buClr>
+                <a:schemeClr val="accent1"/>
+              </a:buClr>
+              <a:buSzPts val="1800"/>
+              <a:buChar char="●"/>
+            </a:pPr>
+            <a:r>
+              <a:rPr b="1" lang="en">
+                <a:solidFill>
+                  <a:schemeClr val="accent1"/>
+                </a:solidFill>
+              </a:rPr>
+              <a:t>Incremental Merge</a:t>
+            </a:r>
+            <a:endParaRPr b="1">
+              <a:solidFill>
+                <a:schemeClr val="accent1"/>
+              </a:solidFill>
+            </a:endParaRPr>
+          </a:p>
+          <a:p>
+            <a:pPr indent="-317500" lvl="1" marL="914400" rtl="0" algn="l">
+              <a:lnSpc>
+                <a:spcPct val="200000"/>
+              </a:lnSpc>
+              <a:spcBef>
+                <a:spcPts val="0"/>
+              </a:spcBef>
+              <a:spcAft>
+                <a:spcPts val="0"/>
+              </a:spcAft>
+              <a:buClr>
+                <a:schemeClr val="accent1"/>
+              </a:buClr>
+              <a:buSzPts val="1400"/>
+              <a:buChar char="○"/>
+            </a:pPr>
+            <a:r>
+              <a:rPr lang="en">
+                <a:solidFill>
+                  <a:schemeClr val="accent1"/>
+                </a:solidFill>
+              </a:rPr>
+              <a:t>Must retain previous alphabetized shifts and merge them with the current line's shifts.</a:t>
+            </a:r>
+            <a:endParaRPr>
+              <a:solidFill>
+                <a:schemeClr val="accent1"/>
+              </a:solidFill>
+            </a:endParaRPr>
+          </a:p>
+          <a:p>
+            <a:pPr indent="-342900" lvl="0" marL="457200" rtl="0" algn="l">
+              <a:lnSpc>
+                <a:spcPct val="200000"/>
+              </a:lnSpc>
+              <a:spcBef>
+                <a:spcPts val="0"/>
+              </a:spcBef>
+              <a:spcAft>
+                <a:spcPts val="0"/>
+              </a:spcAft>
+              <a:buClr>
+                <a:schemeClr val="accent1"/>
+              </a:buClr>
+              <a:buSzPts val="1800"/>
+              <a:buChar char="●"/>
+            </a:pPr>
+            <a:r>
+              <a:rPr b="1" lang="en">
+                <a:solidFill>
+                  <a:schemeClr val="accent1"/>
+                </a:solidFill>
+              </a:rPr>
+              <a:t>Output Timing</a:t>
+            </a:r>
+            <a:endParaRPr b="1">
+              <a:solidFill>
+                <a:schemeClr val="accent1"/>
+              </a:solidFill>
+            </a:endParaRPr>
+          </a:p>
+          <a:p>
+            <a:pPr indent="-317500" lvl="1" marL="914400" rtl="0" algn="l">
+              <a:lnSpc>
+                <a:spcPct val="200000"/>
+              </a:lnSpc>
+              <a:spcBef>
+                <a:spcPts val="0"/>
+              </a:spcBef>
+              <a:spcAft>
+                <a:spcPts val="0"/>
+              </a:spcAft>
+              <a:buClr>
+                <a:schemeClr val="accent1"/>
+              </a:buClr>
+              <a:buSzPts val="1400"/>
+              <a:buChar char="○"/>
+            </a:pPr>
+            <a:r>
+              <a:rPr lang="en">
+                <a:solidFill>
+                  <a:schemeClr val="accent1"/>
+                </a:solidFill>
+              </a:rPr>
+              <a:t>Output keeps updating based on incremental processing</a:t>
+            </a:r>
+            <a:endParaRPr>
+              <a:solidFill>
+                <a:schemeClr val="accent1"/>
+              </a:solidFill>
+            </a:endParaRPr>
+          </a:p>
+          <a:p>
+            <a:pPr indent="-342900" lvl="0" marL="457200" rtl="0" algn="l">
+              <a:lnSpc>
+                <a:spcPct val="200000"/>
+              </a:lnSpc>
+              <a:spcBef>
+                <a:spcPts val="0"/>
+              </a:spcBef>
+              <a:spcAft>
+                <a:spcPts val="0"/>
+              </a:spcAft>
+              <a:buClr>
+                <a:schemeClr val="accent1"/>
+              </a:buClr>
+              <a:buSzPts val="1800"/>
+              <a:buChar char="●"/>
+            </a:pPr>
+            <a:r>
+              <a:rPr b="1" lang="en" sz="1800">
+                <a:solidFill>
+                  <a:schemeClr val="accent1"/>
+                </a:solidFill>
+              </a:rPr>
+              <a:t>Information Hiding</a:t>
+            </a:r>
+            <a:endParaRPr b="1" sz="1800">
+              <a:solidFill>
+                <a:schemeClr val="accent1"/>
+              </a:solidFill>
+            </a:endParaRPr>
+          </a:p>
+          <a:p>
+            <a:pPr indent="-317500" lvl="1" marL="914400" rtl="0" algn="l">
+              <a:lnSpc>
+                <a:spcPct val="200000"/>
+              </a:lnSpc>
+              <a:spcBef>
+                <a:spcPts val="0"/>
+              </a:spcBef>
+              <a:spcAft>
+                <a:spcPts val="0"/>
+              </a:spcAft>
+              <a:buClr>
+                <a:schemeClr val="accent1"/>
+              </a:buClr>
+              <a:buSzPts val="1400"/>
+              <a:buChar char="○"/>
+            </a:pPr>
+            <a:r>
+              <a:rPr lang="en">
+                <a:solidFill>
+                  <a:schemeClr val="accent1"/>
+                </a:solidFill>
+              </a:rPr>
+              <a:t>Each component exposes (public) only the operations required by other components.</a:t>
+            </a:r>
+            <a:endParaRPr>
               <a:solidFill>
                 <a:schemeClr val="accent1"/>
               </a:solidFill>
@@ -13153,12 +13653,12 @@
               <a:buNone/>
             </a:pPr>
             <a:r>
-              <a:rPr b="1" lang="en">
+              <a:rPr lang="en">
                 <a:solidFill>
                   <a:schemeClr val="accent1"/>
                 </a:solidFill>
               </a:rPr>
-              <a:t>RATIONALE</a:t>
+              <a:t>Now we talk about the most important part</a:t>
             </a:r>
             <a:endParaRPr b="1">
               <a:solidFill>
@@ -13243,47 +13743,39 @@
         </p:nvSpPr>
         <p:spPr>
           <a:xfrm>
-            <a:off x="311700" y="315925"/>
-            <a:ext cx="8520600" cy="831300"/>
+            <a:off x="773700" y="1806450"/>
+            <a:ext cx="7596600" cy="1530600"/>
           </a:xfrm>
           <a:prstGeom prst="rect">
             <a:avLst/>
           </a:prstGeom>
         </p:spPr>
         <p:txBody>
-          <a:bodyPr anchorCtr="0" anchor="b" bIns="91425" lIns="91425" spcFirstLastPara="1" rIns="91425" wrap="square" tIns="91425">
-            <a:normAutofit fontScale="90000"/>
+          <a:bodyPr anchorCtr="0" anchor="ctr" bIns="91425" lIns="91425" spcFirstLastPara="1" rIns="91425" wrap="square" tIns="91425">
+            <a:normAutofit/>
           </a:bodyPr>
           <a:lstStyle/>
           <a:p>
-            <a:pPr indent="0" lvl="0" marL="0" rtl="0" algn="l">
-              <a:spcBef>
-                <a:spcPts val="0"/>
-              </a:spcBef>
-              <a:spcAft>
-                <a:spcPts val="0"/>
-              </a:spcAft>
-              <a:buNone/>
-            </a:pPr>
-            <a:r>
-              <a:rPr lang="en">
+            <a:pPr indent="0" lvl="0" marL="0" rtl="0" algn="ctr">
+              <a:spcBef>
+                <a:spcPts val="0"/>
+              </a:spcBef>
+              <a:spcAft>
+                <a:spcPts val="0"/>
+              </a:spcAft>
+              <a:buNone/>
+            </a:pPr>
+            <a:r>
+              <a:rPr b="1" lang="en">
                 <a:solidFill>
                   <a:schemeClr val="accent1"/>
                 </a:solidFill>
               </a:rPr>
-              <a:t>Architectural Rationale - </a:t>
-            </a:r>
-            <a:r>
-              <a:rPr b="1" lang="en">
-                <a:solidFill>
-                  <a:srgbClr val="188038"/>
-                </a:solidFill>
-              </a:rPr>
-              <a:t>Modifiability of Algorithms</a:t>
+              <a:t>RATIONALE</a:t>
             </a:r>
             <a:endParaRPr b="1">
               <a:solidFill>
-                <a:srgbClr val="188038"/>
+                <a:schemeClr val="accent1"/>
               </a:solidFill>
             </a:endParaRPr>
           </a:p>
@@ -13326,251 +13818,6 @@
               <a:t>‹#›</a:t>
             </a:fld>
             <a:endParaRPr/>
-          </a:p>
-        </p:txBody>
-      </p:sp>
-      <p:pic>
-        <p:nvPicPr>
-          <p:cNvPr id="243" name="Google Shape;243;p36" title="QuickdexDesign.png"/>
-          <p:cNvPicPr preferRelativeResize="0"/>
-          <p:nvPr/>
-        </p:nvPicPr>
-        <p:blipFill rotWithShape="1">
-          <a:blip r:embed="rId3">
-            <a:alphaModFix/>
-          </a:blip>
-          <a:srcRect b="0" l="13206" r="24705" t="59902"/>
-          <a:stretch/>
-        </p:blipFill>
-        <p:spPr>
-          <a:xfrm>
-            <a:off x="902925" y="1648048"/>
-            <a:ext cx="7338148" cy="2119526"/>
-          </a:xfrm>
-          <a:prstGeom prst="rect">
-            <a:avLst/>
-          </a:prstGeom>
-          <a:noFill/>
-          <a:ln>
-            <a:noFill/>
-          </a:ln>
-        </p:spPr>
-      </p:pic>
-      <p:sp>
-        <p:nvSpPr>
-          <p:cNvPr id="244" name="Google Shape;244;p36"/>
-          <p:cNvSpPr/>
-          <p:nvPr/>
-        </p:nvSpPr>
-        <p:spPr>
-          <a:xfrm>
-            <a:off x="2913848" y="2794423"/>
-            <a:ext cx="986400" cy="791400"/>
-          </a:xfrm>
-          <a:prstGeom prst="rect">
-            <a:avLst/>
-          </a:prstGeom>
-          <a:noFill/>
-          <a:ln cap="flat" cmpd="sng" w="65875">
-            <a:solidFill>
-              <a:srgbClr val="188038"/>
-            </a:solidFill>
-            <a:prstDash val="solid"/>
-            <a:round/>
-            <a:headEnd len="sm" w="sm" type="none"/>
-            <a:tailEnd len="sm" w="sm" type="none"/>
-          </a:ln>
-        </p:spPr>
-        <p:txBody>
-          <a:bodyPr anchorCtr="0" anchor="ctr" bIns="158050" lIns="158050" spcFirstLastPara="1" rIns="158050" wrap="square" tIns="158050">
-            <a:noAutofit/>
-          </a:bodyPr>
-          <a:lstStyle/>
-          <a:p>
-            <a:pPr indent="0" lvl="0" marL="0" rtl="0" algn="ctr">
-              <a:spcBef>
-                <a:spcPts val="0"/>
-              </a:spcBef>
-              <a:spcAft>
-                <a:spcPts val="0"/>
-              </a:spcAft>
-              <a:buNone/>
-            </a:pPr>
-            <a:r>
-              <a:t/>
-            </a:r>
-            <a:endParaRPr sz="2420">
-              <a:latin typeface="Open Sans"/>
-              <a:ea typeface="Open Sans"/>
-              <a:cs typeface="Open Sans"/>
-              <a:sym typeface="Open Sans"/>
-            </a:endParaRPr>
-          </a:p>
-        </p:txBody>
-      </p:sp>
-      <p:sp>
-        <p:nvSpPr>
-          <p:cNvPr id="245" name="Google Shape;245;p36"/>
-          <p:cNvSpPr/>
-          <p:nvPr/>
-        </p:nvSpPr>
-        <p:spPr>
-          <a:xfrm>
-            <a:off x="6534500" y="2794423"/>
-            <a:ext cx="1187100" cy="791400"/>
-          </a:xfrm>
-          <a:prstGeom prst="rect">
-            <a:avLst/>
-          </a:prstGeom>
-          <a:noFill/>
-          <a:ln cap="flat" cmpd="sng" w="65875">
-            <a:solidFill>
-              <a:srgbClr val="188038"/>
-            </a:solidFill>
-            <a:prstDash val="solid"/>
-            <a:round/>
-            <a:headEnd len="sm" w="sm" type="none"/>
-            <a:tailEnd len="sm" w="sm" type="none"/>
-          </a:ln>
-        </p:spPr>
-        <p:txBody>
-          <a:bodyPr anchorCtr="0" anchor="ctr" bIns="158050" lIns="158050" spcFirstLastPara="1" rIns="158050" wrap="square" tIns="158050">
-            <a:noAutofit/>
-          </a:bodyPr>
-          <a:lstStyle/>
-          <a:p>
-            <a:pPr indent="0" lvl="0" marL="0" rtl="0" algn="ctr">
-              <a:spcBef>
-                <a:spcPts val="0"/>
-              </a:spcBef>
-              <a:spcAft>
-                <a:spcPts val="0"/>
-              </a:spcAft>
-              <a:buNone/>
-            </a:pPr>
-            <a:r>
-              <a:t/>
-            </a:r>
-            <a:endParaRPr sz="2420">
-              <a:latin typeface="Open Sans"/>
-              <a:ea typeface="Open Sans"/>
-              <a:cs typeface="Open Sans"/>
-              <a:sym typeface="Open Sans"/>
-            </a:endParaRPr>
-          </a:p>
-        </p:txBody>
-      </p:sp>
-      <p:sp>
-        <p:nvSpPr>
-          <p:cNvPr id="246" name="Google Shape;246;p36"/>
-          <p:cNvSpPr txBox="1"/>
-          <p:nvPr/>
-        </p:nvSpPr>
-        <p:spPr>
-          <a:xfrm>
-            <a:off x="415500" y="4011663"/>
-            <a:ext cx="8313000" cy="443700"/>
-          </a:xfrm>
-          <a:prstGeom prst="rect">
-            <a:avLst/>
-          </a:prstGeom>
-          <a:noFill/>
-          <a:ln>
-            <a:noFill/>
-          </a:ln>
-        </p:spPr>
-        <p:txBody>
-          <a:bodyPr anchorCtr="0" anchor="t" bIns="91425" lIns="91425" spcFirstLastPara="1" rIns="91425" wrap="square" tIns="91425">
-            <a:noAutofit/>
-          </a:bodyPr>
-          <a:lstStyle/>
-          <a:p>
-            <a:pPr indent="0" lvl="0" marL="0" rtl="0" algn="ctr">
-              <a:spcBef>
-                <a:spcPts val="0"/>
-              </a:spcBef>
-              <a:spcAft>
-                <a:spcPts val="0"/>
-              </a:spcAft>
-              <a:buNone/>
-            </a:pPr>
-            <a:r>
-              <a:rPr lang="en" sz="1800">
-                <a:solidFill>
-                  <a:schemeClr val="accent1"/>
-                </a:solidFill>
-                <a:latin typeface="Open Sans"/>
-                <a:ea typeface="Open Sans"/>
-                <a:cs typeface="Open Sans"/>
-                <a:sym typeface="Open Sans"/>
-              </a:rPr>
-              <a:t>These processing algorithms are </a:t>
-            </a:r>
-            <a:r>
-              <a:rPr b="1" lang="en" sz="1800">
-                <a:solidFill>
-                  <a:schemeClr val="accent1"/>
-                </a:solidFill>
-                <a:latin typeface="Open Sans"/>
-                <a:ea typeface="Open Sans"/>
-                <a:cs typeface="Open Sans"/>
-                <a:sym typeface="Open Sans"/>
-              </a:rPr>
-              <a:t>isolated within their components</a:t>
-            </a:r>
-            <a:r>
-              <a:rPr lang="en" sz="1800">
-                <a:solidFill>
-                  <a:schemeClr val="accent1"/>
-                </a:solidFill>
-                <a:latin typeface="Open Sans"/>
-                <a:ea typeface="Open Sans"/>
-                <a:cs typeface="Open Sans"/>
-                <a:sym typeface="Open Sans"/>
-              </a:rPr>
-              <a:t>.</a:t>
-            </a:r>
-            <a:endParaRPr sz="1800">
-              <a:solidFill>
-                <a:schemeClr val="accent1"/>
-              </a:solidFill>
-              <a:latin typeface="Open Sans"/>
-              <a:ea typeface="Open Sans"/>
-              <a:cs typeface="Open Sans"/>
-              <a:sym typeface="Open Sans"/>
-            </a:endParaRPr>
-          </a:p>
-          <a:p>
-            <a:pPr indent="0" lvl="0" marL="0" rtl="0" algn="ctr">
-              <a:spcBef>
-                <a:spcPts val="0"/>
-              </a:spcBef>
-              <a:spcAft>
-                <a:spcPts val="0"/>
-              </a:spcAft>
-              <a:buNone/>
-            </a:pPr>
-            <a:r>
-              <a:rPr lang="en" sz="1800">
-                <a:solidFill>
-                  <a:schemeClr val="lt1"/>
-                </a:solidFill>
-                <a:latin typeface="Open Sans"/>
-                <a:ea typeface="Open Sans"/>
-                <a:cs typeface="Open Sans"/>
-                <a:sym typeface="Open Sans"/>
-              </a:rPr>
-              <a:t>Thus, algorithm changes have minimal impact on other components.</a:t>
-            </a:r>
-            <a:endParaRPr sz="1800">
-              <a:solidFill>
-                <a:schemeClr val="lt1"/>
-              </a:solidFill>
-              <a:latin typeface="Open Sans"/>
-              <a:ea typeface="Open Sans"/>
-              <a:cs typeface="Open Sans"/>
-              <a:sym typeface="Open Sans"/>
-            </a:endParaRPr>
           </a:p>
         </p:txBody>
       </p:sp>
@@ -13587,7 +13834,7 @@
   <p:cSld>
     <p:spTree>
       <p:nvGrpSpPr>
-        <p:cNvPr id="250" name="Shape 250"/>
+        <p:cNvPr id="246" name="Shape 246"/>
         <p:cNvGrpSpPr/>
         <p:nvPr/>
       </p:nvGrpSpPr>
@@ -13601,7 +13848,7 @@
       </p:grpSpPr>
       <p:sp>
         <p:nvSpPr>
-          <p:cNvPr id="251" name="Google Shape;251;p37"/>
+          <p:cNvPr id="247" name="Google Shape;247;p37"/>
           <p:cNvSpPr txBox="1"/>
           <p:nvPr>
             <p:ph type="title"/>
@@ -13657,7 +13904,7 @@
       </p:sp>
       <p:sp>
         <p:nvSpPr>
-          <p:cNvPr id="252" name="Google Shape;252;p37"/>
+          <p:cNvPr id="248" name="Google Shape;248;p37"/>
           <p:cNvSpPr txBox="1"/>
           <p:nvPr>
             <p:ph idx="12" type="sldNum"/>
@@ -13697,7 +13944,7 @@
       </p:sp>
       <p:pic>
         <p:nvPicPr>
-          <p:cNvPr id="253" name="Google Shape;253;p37" title="QuickdexDesign.png"/>
+          <p:cNvPr id="249" name="Google Shape;249;p37" title="QuickdexDesign.png"/>
           <p:cNvPicPr preferRelativeResize="0"/>
           <p:nvPr/>
         </p:nvPicPr>
@@ -13724,7 +13971,7 @@
       </p:pic>
       <p:sp>
         <p:nvSpPr>
-          <p:cNvPr id="254" name="Google Shape;254;p37"/>
+          <p:cNvPr id="250" name="Google Shape;250;p37"/>
           <p:cNvSpPr/>
           <p:nvPr/>
         </p:nvSpPr>
@@ -13776,7 +14023,7 @@
       </p:sp>
       <p:sp>
         <p:nvSpPr>
-          <p:cNvPr id="255" name="Google Shape;255;p37"/>
+          <p:cNvPr id="251" name="Google Shape;251;p37"/>
           <p:cNvSpPr/>
           <p:nvPr/>
         </p:nvSpPr>
@@ -13828,7 +14075,7 @@
       </p:sp>
       <p:sp>
         <p:nvSpPr>
-          <p:cNvPr id="256" name="Google Shape;256;p37"/>
+          <p:cNvPr id="252" name="Google Shape;252;p37"/>
           <p:cNvSpPr txBox="1"/>
           <p:nvPr/>
         </p:nvSpPr>
@@ -13870,7 +14117,31 @@
                 <a:cs typeface="Open Sans"/>
                 <a:sym typeface="Open Sans"/>
               </a:rPr>
-              <a:t>These processing algorithms are isolated within their components.</a:t>
+              <a:t>These processing algorithms are </a:t>
+            </a:r>
+            <a:r>
+              <a:rPr b="1" lang="en" sz="1800">
+                <a:solidFill>
+                  <a:schemeClr val="accent1"/>
+                </a:solidFill>
+                <a:latin typeface="Open Sans"/>
+                <a:ea typeface="Open Sans"/>
+                <a:cs typeface="Open Sans"/>
+                <a:sym typeface="Open Sans"/>
+              </a:rPr>
+              <a:t>isolated within their components</a:t>
+            </a:r>
+            <a:r>
+              <a:rPr lang="en" sz="1800">
+                <a:solidFill>
+                  <a:schemeClr val="accent1"/>
+                </a:solidFill>
+                <a:latin typeface="Open Sans"/>
+                <a:ea typeface="Open Sans"/>
+                <a:cs typeface="Open Sans"/>
+                <a:sym typeface="Open Sans"/>
+              </a:rPr>
+              <a:t>.</a:t>
             </a:r>
             <a:endParaRPr sz="1800">
               <a:solidFill>
@@ -13895,42 +14166,18 @@
             <a:r>
               <a:rPr lang="en" sz="1800">
                 <a:solidFill>
-                  <a:schemeClr val="accent1"/>
+                  <a:schemeClr val="lt1"/>
                 </a:solidFill>
                 <a:latin typeface="Open Sans"/>
                 <a:ea typeface="Open Sans"/>
                 <a:cs typeface="Open Sans"/>
                 <a:sym typeface="Open Sans"/>
               </a:rPr>
-              <a:t>Thus, </a:t>
-            </a:r>
-            <a:r>
-              <a:rPr b="1" lang="en" sz="1800">
-                <a:solidFill>
-                  <a:schemeClr val="accent1"/>
-                </a:solidFill>
-                <a:latin typeface="Open Sans"/>
-                <a:ea typeface="Open Sans"/>
-                <a:cs typeface="Open Sans"/>
-                <a:sym typeface="Open Sans"/>
-              </a:rPr>
-              <a:t>algorithm changes have minimal impact</a:t>
-            </a:r>
-            <a:r>
-              <a:rPr lang="en" sz="1800">
-                <a:solidFill>
-                  <a:schemeClr val="accent1"/>
-                </a:solidFill>
-                <a:latin typeface="Open Sans"/>
-                <a:ea typeface="Open Sans"/>
-                <a:cs typeface="Open Sans"/>
-                <a:sym typeface="Open Sans"/>
-              </a:rPr>
-              <a:t> on other components.</a:t>
+              <a:t>Thus, algorithm changes have minimal impact on other components.</a:t>
             </a:r>
             <a:endParaRPr sz="1800">
               <a:solidFill>
-                <a:schemeClr val="accent1"/>
+                <a:schemeClr val="lt1"/>
               </a:solidFill>
               <a:latin typeface="Open Sans"/>
               <a:ea typeface="Open Sans"/>
@@ -13953,7 +14200,7 @@
   <p:cSld>
     <p:spTree>
       <p:nvGrpSpPr>
-        <p:cNvPr id="260" name="Shape 260"/>
+        <p:cNvPr id="256" name="Shape 256"/>
         <p:cNvGrpSpPr/>
         <p:nvPr/>
       </p:nvGrpSpPr>
@@ -13967,7 +14214,7 @@
       </p:grpSpPr>
       <p:sp>
         <p:nvSpPr>
-          <p:cNvPr id="261" name="Google Shape;261;p38"/>
+          <p:cNvPr id="257" name="Google Shape;257;p38"/>
           <p:cNvSpPr txBox="1"/>
           <p:nvPr>
             <p:ph type="title"/>
@@ -13984,7 +14231,7 @@
         </p:spPr>
         <p:txBody>
           <a:bodyPr anchorCtr="0" anchor="b" bIns="91425" lIns="91425" spcFirstLastPara="1" rIns="91425" wrap="square" tIns="91425">
-            <a:normAutofit/>
+            <a:normAutofit fontScale="90000"/>
           </a:bodyPr>
           <a:lstStyle/>
           <a:p>
@@ -14011,7 +14258,7 @@
                   <a:srgbClr val="188038"/>
                 </a:solidFill>
               </a:rPr>
-              <a:t>Modifiability of Data</a:t>
+              <a:t>Modifiability of Algorithms</a:t>
             </a:r>
             <a:endParaRPr b="1">
               <a:solidFill>
@@ -14023,124 +14270,7 @@
       </p:sp>
       <p:sp>
         <p:nvSpPr>
-          <p:cNvPr id="262" name="Google Shape;262;p38"/>
-          <p:cNvSpPr txBox="1"/>
-          <p:nvPr>
-            <p:ph idx="1" type="body"/>
-          </p:nvPr>
-        </p:nvSpPr>
-        <p:spPr>
-          <a:xfrm>
-            <a:off x="311700" y="1225225"/>
-            <a:ext cx="8272200" cy="3577200"/>
-          </a:xfrm>
-          <a:prstGeom prst="rect">
-            <a:avLst/>
-          </a:prstGeom>
-        </p:spPr>
-        <p:txBody>
-          <a:bodyPr anchorCtr="0" anchor="t" bIns="91425" lIns="91425" spcFirstLastPara="1" rIns="91425" wrap="square" tIns="91425">
-            <a:normAutofit/>
-          </a:bodyPr>
-          <a:lstStyle/>
-          <a:p>
-            <a:pPr indent="-342900" lvl="0" marL="457200" rtl="0" algn="l">
-              <a:lnSpc>
-                <a:spcPct val="200000"/>
-              </a:lnSpc>
-              <a:spcBef>
-                <a:spcPts val="0"/>
-              </a:spcBef>
-              <a:spcAft>
-                <a:spcPts val="0"/>
-              </a:spcAft>
-              <a:buClr>
-                <a:schemeClr val="accent1"/>
-              </a:buClr>
-              <a:buSzPts val="1800"/>
-              <a:buChar char="●"/>
-            </a:pPr>
-            <a:r>
-              <a:rPr lang="en">
-                <a:solidFill>
-                  <a:schemeClr val="accent1"/>
-                </a:solidFill>
-              </a:rPr>
-              <a:t>Data representation is hidden behind component operations.</a:t>
-            </a:r>
-            <a:endParaRPr>
-              <a:solidFill>
-                <a:schemeClr val="accent1"/>
-              </a:solidFill>
-            </a:endParaRPr>
-          </a:p>
-          <a:p>
-            <a:pPr indent="-342900" lvl="0" marL="457200" rtl="0" algn="l">
-              <a:lnSpc>
-                <a:spcPct val="200000"/>
-              </a:lnSpc>
-              <a:spcBef>
-                <a:spcPts val="0"/>
-              </a:spcBef>
-              <a:spcAft>
-                <a:spcPts val="0"/>
-              </a:spcAft>
-              <a:buClr>
-                <a:schemeClr val="accent1"/>
-              </a:buClr>
-              <a:buSzPts val="1800"/>
-              <a:buChar char="●"/>
-            </a:pPr>
-            <a:r>
-              <a:rPr lang="en">
-                <a:solidFill>
-                  <a:schemeClr val="accent1"/>
-                </a:solidFill>
-              </a:rPr>
-              <a:t>Changes to how lines, characters, or shifts are stored (e.g., type of array, compressed/uncompressed) do not require changes to clients.</a:t>
-            </a:r>
-            <a:endParaRPr>
-              <a:solidFill>
-                <a:schemeClr val="accent1"/>
-              </a:solidFill>
-            </a:endParaRPr>
-          </a:p>
-          <a:p>
-            <a:pPr indent="-342900" lvl="0" marL="457200" rtl="0" algn="l">
-              <a:lnSpc>
-                <a:spcPct val="200000"/>
-              </a:lnSpc>
-              <a:spcBef>
-                <a:spcPts val="0"/>
-              </a:spcBef>
-              <a:spcAft>
-                <a:spcPts val="0"/>
-              </a:spcAft>
-              <a:buClr>
-                <a:schemeClr val="accent1"/>
-              </a:buClr>
-              <a:buSzPts val="1800"/>
-              <a:buChar char="●"/>
-            </a:pPr>
-            <a:r>
-              <a:rPr lang="en">
-                <a:solidFill>
-                  <a:schemeClr val="accent1"/>
-                </a:solidFill>
-              </a:rPr>
-              <a:t>Supports alternative storage representations.</a:t>
-            </a:r>
-            <a:endParaRPr>
-              <a:solidFill>
-                <a:schemeClr val="accent1"/>
-              </a:solidFill>
-            </a:endParaRPr>
-          </a:p>
-        </p:txBody>
-      </p:sp>
-      <p:sp>
-        <p:nvSpPr>
-          <p:cNvPr id="263" name="Google Shape;263;p38"/>
+          <p:cNvPr id="258" name="Google Shape;258;p38"/>
           <p:cNvSpPr txBox="1"/>
           <p:nvPr>
             <p:ph idx="12" type="sldNum"/>
@@ -14175,6 +14305,251 @@
               <a:t>‹#›</a:t>
             </a:fld>
             <a:endParaRPr/>
+          </a:p>
+        </p:txBody>
+      </p:sp>
+      <p:pic>
+        <p:nvPicPr>
+          <p:cNvPr id="259" name="Google Shape;259;p38" title="QuickdexDesign.png"/>
+          <p:cNvPicPr preferRelativeResize="0"/>
+          <p:nvPr/>
+        </p:nvPicPr>
+        <p:blipFill rotWithShape="1">
+          <a:blip r:embed="rId3">
+            <a:alphaModFix/>
+          </a:blip>
+          <a:srcRect b="0" l="13206" r="24705" t="59902"/>
+          <a:stretch/>
+        </p:blipFill>
+        <p:spPr>
+          <a:xfrm>
+            <a:off x="902925" y="1648048"/>
+            <a:ext cx="7338148" cy="2119526"/>
+          </a:xfrm>
+          <a:prstGeom prst="rect">
+            <a:avLst/>
+          </a:prstGeom>
+          <a:noFill/>
+          <a:ln>
+            <a:noFill/>
+          </a:ln>
+        </p:spPr>
+      </p:pic>
+      <p:sp>
+        <p:nvSpPr>
+          <p:cNvPr id="260" name="Google Shape;260;p38"/>
+          <p:cNvSpPr/>
+          <p:nvPr/>
+        </p:nvSpPr>
+        <p:spPr>
+          <a:xfrm>
+            <a:off x="2913848" y="2794423"/>
+            <a:ext cx="986400" cy="791400"/>
+          </a:xfrm>
+          <a:prstGeom prst="rect">
+            <a:avLst/>
+          </a:prstGeom>
+          <a:noFill/>
+          <a:ln cap="flat" cmpd="sng" w="65875">
+            <a:solidFill>
+              <a:srgbClr val="188038"/>
+            </a:solidFill>
+            <a:prstDash val="solid"/>
+            <a:round/>
+            <a:headEnd len="sm" w="sm" type="none"/>
+            <a:tailEnd len="sm" w="sm" type="none"/>
+          </a:ln>
+        </p:spPr>
+        <p:txBody>
+          <a:bodyPr anchorCtr="0" anchor="ctr" bIns="158050" lIns="158050" spcFirstLastPara="1" rIns="158050" wrap="square" tIns="158050">
+            <a:noAutofit/>
+          </a:bodyPr>
+          <a:lstStyle/>
+          <a:p>
+            <a:pPr indent="0" lvl="0" marL="0" rtl="0" algn="ctr">
+              <a:spcBef>
+                <a:spcPts val="0"/>
+              </a:spcBef>
+              <a:spcAft>
+                <a:spcPts val="0"/>
+              </a:spcAft>
+              <a:buNone/>
+            </a:pPr>
+            <a:r>
+              <a:t/>
+            </a:r>
+            <a:endParaRPr sz="2420">
+              <a:latin typeface="Open Sans"/>
+              <a:ea typeface="Open Sans"/>
+              <a:cs typeface="Open Sans"/>
+              <a:sym typeface="Open Sans"/>
+            </a:endParaRPr>
+          </a:p>
+        </p:txBody>
+      </p:sp>
+      <p:sp>
+        <p:nvSpPr>
+          <p:cNvPr id="261" name="Google Shape;261;p38"/>
+          <p:cNvSpPr/>
+          <p:nvPr/>
+        </p:nvSpPr>
+        <p:spPr>
+          <a:xfrm>
+            <a:off x="6534500" y="2794423"/>
+            <a:ext cx="1187100" cy="791400"/>
+          </a:xfrm>
+          <a:prstGeom prst="rect">
+            <a:avLst/>
+          </a:prstGeom>
+          <a:noFill/>
+          <a:ln cap="flat" cmpd="sng" w="65875">
+            <a:solidFill>
+              <a:srgbClr val="188038"/>
+            </a:solidFill>
+            <a:prstDash val="solid"/>
+            <a:round/>
+            <a:headEnd len="sm" w="sm" type="none"/>
+            <a:tailEnd len="sm" w="sm" type="none"/>
+          </a:ln>
+        </p:spPr>
+        <p:txBody>
+          <a:bodyPr anchorCtr="0" anchor="ctr" bIns="158050" lIns="158050" spcFirstLastPara="1" rIns="158050" wrap="square" tIns="158050">
+            <a:noAutofit/>
+          </a:bodyPr>
+          <a:lstStyle/>
+          <a:p>
+            <a:pPr indent="0" lvl="0" marL="0" rtl="0" algn="ctr">
+              <a:spcBef>
+                <a:spcPts val="0"/>
+              </a:spcBef>
+              <a:spcAft>
+                <a:spcPts val="0"/>
+              </a:spcAft>
+              <a:buNone/>
+            </a:pPr>
+            <a:r>
+              <a:t/>
+            </a:r>
+            <a:endParaRPr sz="2420">
+              <a:latin typeface="Open Sans"/>
+              <a:ea typeface="Open Sans"/>
+              <a:cs typeface="Open Sans"/>
+              <a:sym typeface="Open Sans"/>
+            </a:endParaRPr>
+          </a:p>
+        </p:txBody>
+      </p:sp>
+      <p:sp>
+        <p:nvSpPr>
+          <p:cNvPr id="262" name="Google Shape;262;p38"/>
+          <p:cNvSpPr txBox="1"/>
+          <p:nvPr/>
+        </p:nvSpPr>
+        <p:spPr>
+          <a:xfrm>
+            <a:off x="415500" y="4011663"/>
+            <a:ext cx="8313000" cy="443700"/>
+          </a:xfrm>
+          <a:prstGeom prst="rect">
+            <a:avLst/>
+          </a:prstGeom>
+          <a:noFill/>
+          <a:ln>
+            <a:noFill/>
+          </a:ln>
+        </p:spPr>
+        <p:txBody>
+          <a:bodyPr anchorCtr="0" anchor="t" bIns="91425" lIns="91425" spcFirstLastPara="1" rIns="91425" wrap="square" tIns="91425">
+            <a:noAutofit/>
+          </a:bodyPr>
+          <a:lstStyle/>
+          <a:p>
+            <a:pPr indent="0" lvl="0" marL="0" rtl="0" algn="ctr">
+              <a:spcBef>
+                <a:spcPts val="0"/>
+              </a:spcBef>
+              <a:spcAft>
+                <a:spcPts val="0"/>
+              </a:spcAft>
+              <a:buNone/>
+            </a:pPr>
+            <a:r>
+              <a:rPr lang="en" sz="1800">
+                <a:solidFill>
+                  <a:schemeClr val="accent1"/>
+                </a:solidFill>
+                <a:latin typeface="Open Sans"/>
+                <a:ea typeface="Open Sans"/>
+                <a:cs typeface="Open Sans"/>
+                <a:sym typeface="Open Sans"/>
+              </a:rPr>
+              <a:t>These processing algorithms are isolated within their components.</a:t>
+            </a:r>
+            <a:endParaRPr sz="1800">
+              <a:solidFill>
+                <a:schemeClr val="accent1"/>
+              </a:solidFill>
+              <a:latin typeface="Open Sans"/>
+              <a:ea typeface="Open Sans"/>
+              <a:cs typeface="Open Sans"/>
+              <a:sym typeface="Open Sans"/>
+            </a:endParaRPr>
+          </a:p>
+          <a:p>
+            <a:pPr indent="0" lvl="0" marL="0" rtl="0" algn="ctr">
+              <a:spcBef>
+                <a:spcPts val="0"/>
+              </a:spcBef>
+              <a:spcAft>
+                <a:spcPts val="0"/>
+              </a:spcAft>
+              <a:buNone/>
+            </a:pPr>
+            <a:r>
+              <a:rPr lang="en" sz="1800">
+                <a:solidFill>
+                  <a:schemeClr val="accent1"/>
+                </a:solidFill>
+                <a:latin typeface="Open Sans"/>
+                <a:ea typeface="Open Sans"/>
+                <a:cs typeface="Open Sans"/>
+                <a:sym typeface="Open Sans"/>
+              </a:rPr>
+              <a:t>Thus, </a:t>
+            </a:r>
+            <a:r>
+              <a:rPr b="1" lang="en" sz="1800">
+                <a:solidFill>
+                  <a:schemeClr val="accent1"/>
+                </a:solidFill>
+                <a:latin typeface="Open Sans"/>
+                <a:ea typeface="Open Sans"/>
+                <a:cs typeface="Open Sans"/>
+                <a:sym typeface="Open Sans"/>
+              </a:rPr>
+              <a:t>algorithm changes have minimal impact</a:t>
+            </a:r>
+            <a:r>
+              <a:rPr lang="en" sz="1800">
+                <a:solidFill>
+                  <a:schemeClr val="accent1"/>
+                </a:solidFill>
+                <a:latin typeface="Open Sans"/>
+                <a:ea typeface="Open Sans"/>
+                <a:cs typeface="Open Sans"/>
+                <a:sym typeface="Open Sans"/>
+              </a:rPr>
+              <a:t> on other components.</a:t>
+            </a:r>
+            <a:endParaRPr sz="1800">
+              <a:solidFill>
+                <a:schemeClr val="accent1"/>
+              </a:solidFill>
+              <a:latin typeface="Open Sans"/>
+              <a:ea typeface="Open Sans"/>
+              <a:cs typeface="Open Sans"/>
+              <a:sym typeface="Open Sans"/>
+            </a:endParaRPr>
           </a:p>
         </p:txBody>
       </p:sp>
@@ -14191,7 +14566,7 @@
   <p:cSld>
     <p:spTree>
       <p:nvGrpSpPr>
-        <p:cNvPr id="267" name="Shape 267"/>
+        <p:cNvPr id="266" name="Shape 266"/>
         <p:cNvGrpSpPr/>
         <p:nvPr/>
       </p:nvGrpSpPr>
@@ -14205,7 +14580,7 @@
       </p:grpSpPr>
       <p:sp>
         <p:nvSpPr>
-          <p:cNvPr id="268" name="Google Shape;268;p39"/>
+          <p:cNvPr id="267" name="Google Shape;267;p39"/>
           <p:cNvSpPr txBox="1"/>
           <p:nvPr>
             <p:ph type="title"/>
@@ -14249,7 +14624,7 @@
                   <a:srgbClr val="188038"/>
                 </a:solidFill>
               </a:rPr>
-              <a:t>Enhanceability</a:t>
+              <a:t>Modifiability of Data</a:t>
             </a:r>
             <a:endParaRPr b="1">
               <a:solidFill>
@@ -14261,7 +14636,7 @@
       </p:sp>
       <p:sp>
         <p:nvSpPr>
-          <p:cNvPr id="269" name="Google Shape;269;p39"/>
+          <p:cNvPr id="268" name="Google Shape;268;p39"/>
           <p:cNvSpPr txBox="1"/>
           <p:nvPr>
             <p:ph idx="1" type="body"/>
@@ -14304,7 +14679,7 @@
                   <a:schemeClr val="accent1"/>
                 </a:solidFill>
               </a:rPr>
-              <a:t>New components can be added for additional functionality.</a:t>
+              <a:t>Data representation is hidden behind component operations.</a:t>
             </a:r>
             <a:endParaRPr>
               <a:solidFill>
@@ -14313,7 +14688,7 @@
             </a:endParaRPr>
           </a:p>
           <a:p>
-            <a:pPr indent="-317500" lvl="1" marL="914400" rtl="0" algn="l">
+            <a:pPr indent="-342900" lvl="0" marL="457200" rtl="0" algn="l">
               <a:lnSpc>
                 <a:spcPct val="200000"/>
               </a:lnSpc>
@@ -14326,8 +14701,8 @@
               <a:buClr>
                 <a:schemeClr val="accent1"/>
               </a:buClr>
-              <a:buSzPts val="1400"/>
-              <a:buChar char="○"/>
+              <a:buSzPts val="1800"/>
+              <a:buChar char="●"/>
             </a:pPr>
             <a:r>
               <a:rPr lang="en">
@@ -14335,7 +14710,7 @@
                   <a:schemeClr val="accent1"/>
                 </a:solidFill>
               </a:rPr>
-              <a:t>Noise word elimination will be added in phase 2.</a:t>
+              <a:t>Changes to how lines, characters, or shifts are stored (e.g., type of array, compressed/uncompressed) do not require changes to clients.</a:t>
             </a:r>
             <a:endParaRPr>
               <a:solidFill>
@@ -14366,7 +14741,7 @@
                   <a:schemeClr val="accent1"/>
                 </a:solidFill>
               </a:rPr>
-              <a:t>Existing components can be extended without exposing their internal processing algorithms.</a:t>
+              <a:t>Supports alternative storage representations.</a:t>
             </a:r>
             <a:endParaRPr>
               <a:solidFill>
@@ -14374,42 +14749,11 @@
               </a:solidFill>
             </a:endParaRPr>
           </a:p>
-          <a:p>
-            <a:pPr indent="-342900" lvl="0" marL="457200" rtl="0" algn="l">
-              <a:lnSpc>
-                <a:spcPct val="200000"/>
-              </a:lnSpc>
-              <a:spcBef>
-                <a:spcPts val="0"/>
-              </a:spcBef>
-              <a:spcAft>
-                <a:spcPts val="0"/>
-              </a:spcAft>
-              <a:buClr>
-                <a:schemeClr val="accent1"/>
-              </a:buClr>
-              <a:buSzPts val="1800"/>
-              <a:buChar char="●"/>
-            </a:pPr>
-            <a:r>
-              <a:rPr lang="en">
-                <a:solidFill>
-                  <a:schemeClr val="accent1"/>
-                </a:solidFill>
-              </a:rPr>
-              <a:t>New enhancements require minimal changes to other components.</a:t>
-            </a:r>
-            <a:endParaRPr>
-              <a:solidFill>
-                <a:schemeClr val="accent1"/>
-              </a:solidFill>
-            </a:endParaRPr>
-          </a:p>
         </p:txBody>
       </p:sp>
       <p:sp>
         <p:nvSpPr>
-          <p:cNvPr id="270" name="Google Shape;270;p39"/>
+          <p:cNvPr id="269" name="Google Shape;269;p39"/>
           <p:cNvSpPr txBox="1"/>
           <p:nvPr>
             <p:ph idx="12" type="sldNum"/>
@@ -14460,7 +14804,7 @@
   <p:cSld>
     <p:spTree>
       <p:nvGrpSpPr>
-        <p:cNvPr id="274" name="Shape 274"/>
+        <p:cNvPr id="273" name="Shape 273"/>
         <p:cNvGrpSpPr/>
         <p:nvPr/>
       </p:nvGrpSpPr>
@@ -14474,7 +14818,7 @@
       </p:grpSpPr>
       <p:sp>
         <p:nvSpPr>
-          <p:cNvPr id="275" name="Google Shape;275;p40"/>
+          <p:cNvPr id="274" name="Google Shape;274;p40"/>
           <p:cNvSpPr txBox="1"/>
           <p:nvPr>
             <p:ph type="title"/>
@@ -14518,7 +14862,7 @@
                   <a:srgbClr val="188038"/>
                 </a:solidFill>
               </a:rPr>
-              <a:t>Reusability</a:t>
+              <a:t>Enhanceability</a:t>
             </a:r>
             <a:endParaRPr b="1">
               <a:solidFill>
@@ -14530,7 +14874,7 @@
       </p:sp>
       <p:sp>
         <p:nvSpPr>
-          <p:cNvPr id="276" name="Google Shape;276;p40"/>
+          <p:cNvPr id="275" name="Google Shape;275;p40"/>
           <p:cNvSpPr txBox="1"/>
           <p:nvPr>
             <p:ph idx="1" type="body"/>
@@ -14573,7 +14917,7 @@
                   <a:schemeClr val="accent1"/>
                 </a:solidFill>
               </a:rPr>
-              <a:t>Components have focused responsibilities:</a:t>
+              <a:t>New components can be added for additional functionality.</a:t>
             </a:r>
             <a:endParaRPr>
               <a:solidFill>
@@ -14604,7 +14948,7 @@
                   <a:schemeClr val="accent1"/>
                 </a:solidFill>
               </a:rPr>
-              <a:t>Input — input acquisition</a:t>
+              <a:t>Noise word elimination will be added in phase 2.</a:t>
             </a:r>
             <a:endParaRPr>
               <a:solidFill>
@@ -14613,7 +14957,7 @@
             </a:endParaRPr>
           </a:p>
           <a:p>
-            <a:pPr indent="-317500" lvl="1" marL="914400" rtl="0" algn="l">
+            <a:pPr indent="-342900" lvl="0" marL="457200" rtl="0" algn="l">
               <a:lnSpc>
                 <a:spcPct val="200000"/>
               </a:lnSpc>
@@ -14626,8 +14970,8 @@
               <a:buClr>
                 <a:schemeClr val="accent1"/>
               </a:buClr>
-              <a:buSzPts val="1400"/>
-              <a:buChar char="○"/>
+              <a:buSzPts val="1800"/>
+              <a:buChar char="●"/>
             </a:pPr>
             <a:r>
               <a:rPr lang="en">
@@ -14635,7 +14979,7 @@
                   <a:schemeClr val="accent1"/>
                 </a:solidFill>
               </a:rPr>
-              <a:t>LineStorage — data storage</a:t>
+              <a:t>Existing components can be extended without exposing their internal processing algorithms.</a:t>
             </a:r>
             <a:endParaRPr>
               <a:solidFill>
@@ -14644,7 +14988,7 @@
             </a:endParaRPr>
           </a:p>
           <a:p>
-            <a:pPr indent="-317500" lvl="1" marL="914400" rtl="0" algn="l">
+            <a:pPr indent="-342900" lvl="0" marL="457200" rtl="0" algn="l">
               <a:lnSpc>
                 <a:spcPct val="200000"/>
               </a:lnSpc>
@@ -14657,8 +15001,8 @@
               <a:buClr>
                 <a:schemeClr val="accent1"/>
               </a:buClr>
-              <a:buSzPts val="1400"/>
-              <a:buChar char="○"/>
+              <a:buSzPts val="1800"/>
+              <a:buChar char="●"/>
             </a:pPr>
             <a:r>
               <a:rPr lang="en">
@@ -14666,7 +15010,7 @@
                   <a:schemeClr val="accent1"/>
                 </a:solidFill>
               </a:rPr>
-              <a:t>CircularShift — shift generation</a:t>
+              <a:t>New enhancements require minimal changes to other components.</a:t>
             </a:r>
             <a:endParaRPr>
               <a:solidFill>
@@ -14674,104 +15018,11 @@
               </a:solidFill>
             </a:endParaRPr>
           </a:p>
-          <a:p>
-            <a:pPr indent="-317500" lvl="1" marL="914400" rtl="0" algn="l">
-              <a:lnSpc>
-                <a:spcPct val="200000"/>
-              </a:lnSpc>
-              <a:spcBef>
-                <a:spcPts val="0"/>
-              </a:spcBef>
-              <a:spcAft>
-                <a:spcPts val="0"/>
-              </a:spcAft>
-              <a:buClr>
-                <a:schemeClr val="accent1"/>
-              </a:buClr>
-              <a:buSzPts val="1400"/>
-              <a:buChar char="○"/>
-            </a:pPr>
-            <a:r>
-              <a:rPr lang="en">
-                <a:solidFill>
-                  <a:schemeClr val="accent1"/>
-                </a:solidFill>
-              </a:rPr>
-              <a:t>Alphabetizer — global sorting</a:t>
-            </a:r>
-            <a:endParaRPr>
-              <a:solidFill>
-                <a:schemeClr val="accent1"/>
-              </a:solidFill>
-            </a:endParaRPr>
-          </a:p>
-          <a:p>
-            <a:pPr indent="-317500" lvl="1" marL="914400" rtl="0" algn="l">
-              <a:lnSpc>
-                <a:spcPct val="200000"/>
-              </a:lnSpc>
-              <a:spcBef>
-                <a:spcPts val="0"/>
-              </a:spcBef>
-              <a:spcAft>
-                <a:spcPts val="0"/>
-              </a:spcAft>
-              <a:buClr>
-                <a:schemeClr val="accent1"/>
-              </a:buClr>
-              <a:buSzPts val="1400"/>
-              <a:buChar char="○"/>
-            </a:pPr>
-            <a:r>
-              <a:rPr lang="en">
-                <a:solidFill>
-                  <a:schemeClr val="accent1"/>
-                </a:solidFill>
-              </a:rPr>
-              <a:t>Output — presentation</a:t>
-            </a:r>
-            <a:endParaRPr>
-              <a:solidFill>
-                <a:schemeClr val="accent1"/>
-              </a:solidFill>
-            </a:endParaRPr>
-          </a:p>
-          <a:p>
-            <a:pPr indent="-342900" lvl="0" marL="457200" rtl="0" algn="l">
-              <a:lnSpc>
-                <a:spcPct val="200000"/>
-              </a:lnSpc>
-              <a:spcBef>
-                <a:spcPts val="0"/>
-              </a:spcBef>
-              <a:spcAft>
-                <a:spcPts val="0"/>
-              </a:spcAft>
-              <a:buClr>
-                <a:schemeClr val="accent1"/>
-              </a:buClr>
-              <a:buSzPts val="1800"/>
-              <a:buChar char="●"/>
-            </a:pPr>
-            <a:r>
-              <a:rPr lang="en">
-                <a:solidFill>
-                  <a:schemeClr val="accent1"/>
-                </a:solidFill>
-              </a:rPr>
-              <a:t>Components make fewer assumptions about other components.</a:t>
-            </a:r>
-            <a:endParaRPr>
-              <a:solidFill>
-                <a:schemeClr val="accent1"/>
-              </a:solidFill>
-            </a:endParaRPr>
-          </a:p>
         </p:txBody>
       </p:sp>
       <p:sp>
         <p:nvSpPr>
-          <p:cNvPr id="277" name="Google Shape;277;p40"/>
+          <p:cNvPr id="276" name="Google Shape;276;p40"/>
           <p:cNvSpPr txBox="1"/>
           <p:nvPr>
             <p:ph idx="12" type="sldNum"/>
@@ -14822,7 +15073,7 @@
   <p:cSld>
     <p:spTree>
       <p:nvGrpSpPr>
-        <p:cNvPr id="281" name="Shape 281"/>
+        <p:cNvPr id="280" name="Shape 280"/>
         <p:cNvGrpSpPr/>
         <p:nvPr/>
       </p:nvGrpSpPr>
@@ -14836,7 +15087,7 @@
       </p:grpSpPr>
       <p:sp>
         <p:nvSpPr>
-          <p:cNvPr id="282" name="Google Shape;282;p41"/>
+          <p:cNvPr id="281" name="Google Shape;281;p41"/>
           <p:cNvSpPr txBox="1"/>
           <p:nvPr>
             <p:ph type="title"/>
@@ -14877,14 +15128,14 @@
             <a:r>
               <a:rPr b="1" lang="en">
                 <a:solidFill>
-                  <a:srgbClr val="F1C232"/>
+                  <a:srgbClr val="188038"/>
                 </a:solidFill>
               </a:rPr>
-              <a:t>Performance</a:t>
+              <a:t>Reusability</a:t>
             </a:r>
             <a:endParaRPr b="1">
               <a:solidFill>
-                <a:srgbClr val="F1C232"/>
+                <a:srgbClr val="188038"/>
               </a:solidFill>
             </a:endParaRPr>
           </a:p>
@@ -14892,7 +15143,7 @@
       </p:sp>
       <p:sp>
         <p:nvSpPr>
-          <p:cNvPr id="283" name="Google Shape;283;p41"/>
+          <p:cNvPr id="282" name="Google Shape;282;p41"/>
           <p:cNvSpPr txBox="1"/>
           <p:nvPr>
             <p:ph idx="1" type="body"/>
@@ -14909,11 +15160,11 @@
         </p:spPr>
         <p:txBody>
           <a:bodyPr anchorCtr="0" anchor="t" bIns="91425" lIns="91425" spcFirstLastPara="1" rIns="91425" wrap="square" tIns="91425">
-            <a:normAutofit fontScale="92500" lnSpcReduction="20000"/>
+            <a:normAutofit/>
           </a:bodyPr>
           <a:lstStyle/>
           <a:p>
-            <a:pPr indent="-334328" lvl="0" marL="457200" rtl="0" algn="l">
+            <a:pPr indent="-342900" lvl="0" marL="457200" rtl="0" algn="l">
               <a:lnSpc>
                 <a:spcPct val="200000"/>
               </a:lnSpc>
@@ -14926,7 +15177,7 @@
               <a:buClr>
                 <a:schemeClr val="accent1"/>
               </a:buClr>
-              <a:buSzPct val="100000"/>
+              <a:buSzPts val="1800"/>
               <a:buChar char="●"/>
             </a:pPr>
             <a:r>
@@ -14935,7 +15186,7 @@
                   <a:schemeClr val="accent1"/>
                 </a:solidFill>
               </a:rPr>
-              <a:t>Space</a:t>
+              <a:t>Components have focused responsibilities:</a:t>
             </a:r>
             <a:endParaRPr>
               <a:solidFill>
@@ -14944,7 +15195,7 @@
             </a:endParaRPr>
           </a:p>
           <a:p>
-            <a:pPr indent="-310832" lvl="1" marL="914400" rtl="0" algn="l">
+            <a:pPr indent="-317500" lvl="1" marL="914400" rtl="0" algn="l">
               <a:lnSpc>
                 <a:spcPct val="200000"/>
               </a:lnSpc>
@@ -14957,7 +15208,7 @@
               <a:buClr>
                 <a:schemeClr val="accent1"/>
               </a:buClr>
-              <a:buSzPct val="100000"/>
+              <a:buSzPts val="1400"/>
               <a:buChar char="○"/>
             </a:pPr>
             <a:r>
@@ -14966,7 +15217,7 @@
                   <a:schemeClr val="accent1"/>
                 </a:solidFill>
               </a:rPr>
-              <a:t>Alphabetizer must retain previously alphabetized shifts for global ordering.</a:t>
+              <a:t>Input — input acquisition</a:t>
             </a:r>
             <a:endParaRPr>
               <a:solidFill>
@@ -14975,7 +15226,7 @@
             </a:endParaRPr>
           </a:p>
           <a:p>
-            <a:pPr indent="-310832" lvl="2" marL="1371600" rtl="0" algn="l">
+            <a:pPr indent="-317500" lvl="1" marL="914400" rtl="0" algn="l">
               <a:lnSpc>
                 <a:spcPct val="200000"/>
               </a:lnSpc>
@@ -14988,8 +15239,8 @@
               <a:buClr>
                 <a:schemeClr val="accent1"/>
               </a:buClr>
-              <a:buSzPct val="100000"/>
-              <a:buChar char="■"/>
+              <a:buSzPts val="1400"/>
+              <a:buChar char="○"/>
             </a:pPr>
             <a:r>
               <a:rPr lang="en">
@@ -14997,7 +15248,7 @@
                   <a:schemeClr val="accent1"/>
                 </a:solidFill>
               </a:rPr>
-              <a:t>Shift storage can therefore grow with the total number of circular shifts.</a:t>
+              <a:t>LineStorage — data storage</a:t>
             </a:r>
             <a:endParaRPr>
               <a:solidFill>
@@ -15006,7 +15257,7 @@
             </a:endParaRPr>
           </a:p>
           <a:p>
-            <a:pPr indent="-310832" lvl="1" marL="914400" rtl="0" algn="l">
+            <a:pPr indent="-317500" lvl="1" marL="914400" rtl="0" algn="l">
               <a:lnSpc>
                 <a:spcPct val="200000"/>
               </a:lnSpc>
@@ -15019,7 +15270,7 @@
               <a:buClr>
                 <a:schemeClr val="accent1"/>
               </a:buClr>
-              <a:buSzPct val="100000"/>
+              <a:buSzPts val="1400"/>
               <a:buChar char="○"/>
             </a:pPr>
             <a:r>
@@ -15028,7 +15279,7 @@
                   <a:schemeClr val="accent1"/>
                 </a:solidFill>
               </a:rPr>
-              <a:t>Different components need individual copies of data.</a:t>
+              <a:t>CircularShift — shift generation</a:t>
             </a:r>
             <a:endParaRPr>
               <a:solidFill>
@@ -15037,7 +15288,7 @@
             </a:endParaRPr>
           </a:p>
           <a:p>
-            <a:pPr indent="-310832" lvl="1" marL="914400" rtl="0" algn="l">
+            <a:pPr indent="-317500" lvl="1" marL="914400" rtl="0" algn="l">
               <a:lnSpc>
                 <a:spcPct val="200000"/>
               </a:lnSpc>
@@ -15050,47 +15301,16 @@
               <a:buClr>
                 <a:schemeClr val="accent1"/>
               </a:buClr>
-              <a:buSzPct val="100000"/>
+              <a:buSzPts val="1400"/>
               <a:buChar char="○"/>
             </a:pPr>
             <a:r>
-              <a:rPr b="1" lang="en">
+              <a:rPr lang="en">
                 <a:solidFill>
                   <a:schemeClr val="accent1"/>
                 </a:solidFill>
               </a:rPr>
-              <a:t>Nowadays, memory is relatively abundant, making this space cost less significant.</a:t>
-            </a:r>
-            <a:endParaRPr b="1">
-              <a:solidFill>
-                <a:schemeClr val="accent1"/>
-              </a:solidFill>
-            </a:endParaRPr>
-          </a:p>
-          <a:p>
-            <a:pPr indent="-334328" lvl="0" marL="457200" rtl="0" algn="l">
-              <a:lnSpc>
-                <a:spcPct val="200000"/>
-              </a:lnSpc>
-              <a:spcBef>
-                <a:spcPts val="0"/>
-              </a:spcBef>
-              <a:spcAft>
-                <a:spcPts val="0"/>
-              </a:spcAft>
-              <a:buClr>
-                <a:schemeClr val="accent1"/>
-              </a:buClr>
-              <a:buSzPct val="100000"/>
-              <a:buChar char="●"/>
-            </a:pPr>
-            <a:r>
-              <a:rPr lang="en">
-                <a:solidFill>
-                  <a:schemeClr val="accent1"/>
-                </a:solidFill>
-              </a:rPr>
-              <a:t>Response Time</a:t>
+              <a:t>Alphabetizer — global sorting</a:t>
             </a:r>
             <a:endParaRPr>
               <a:solidFill>
@@ -15099,7 +15319,7 @@
             </a:endParaRPr>
           </a:p>
           <a:p>
-            <a:pPr indent="-310832" lvl="1" marL="914400" rtl="0" algn="l">
+            <a:pPr indent="-317500" lvl="1" marL="914400" rtl="0" algn="l">
               <a:lnSpc>
                 <a:spcPct val="200000"/>
               </a:lnSpc>
@@ -15112,7 +15332,7 @@
               <a:buClr>
                 <a:schemeClr val="accent1"/>
               </a:buClr>
-              <a:buSzPct val="100000"/>
+              <a:buSzPts val="1400"/>
               <a:buChar char="○"/>
             </a:pPr>
             <a:r>
@@ -15121,7 +15341,7 @@
                   <a:schemeClr val="accent1"/>
                 </a:solidFill>
               </a:rPr>
-              <a:t>Data copying in different components cost time.</a:t>
+              <a:t>Output — presentation</a:t>
             </a:r>
             <a:endParaRPr>
               <a:solidFill>
@@ -15130,7 +15350,7 @@
             </a:endParaRPr>
           </a:p>
           <a:p>
-            <a:pPr indent="-310832" lvl="1" marL="914400" rtl="0" algn="l">
+            <a:pPr indent="-342900" lvl="0" marL="457200" rtl="0" algn="l">
               <a:lnSpc>
                 <a:spcPct val="200000"/>
               </a:lnSpc>
@@ -15143,67 +15363,28 @@
               <a:buClr>
                 <a:schemeClr val="accent1"/>
               </a:buClr>
-              <a:buSzPct val="100000"/>
-              <a:buChar char="○"/>
-            </a:pPr>
-            <a:r>
-              <a:rPr b="1" lang="en">
+              <a:buSzPts val="1800"/>
+              <a:buChar char="●"/>
+            </a:pPr>
+            <a:r>
+              <a:rPr lang="en">
                 <a:solidFill>
                   <a:schemeClr val="accent1"/>
                 </a:solidFill>
               </a:rPr>
-              <a:t>Incremental processing saves time by using RAM instead of hard drives.</a:t>
-            </a:r>
-            <a:endParaRPr b="1">
+              <a:t>Components make fewer assumptions about other components.</a:t>
+            </a:r>
+            <a:endParaRPr>
               <a:solidFill>
                 <a:schemeClr val="accent1"/>
               </a:solidFill>
             </a:endParaRPr>
           </a:p>
-          <a:p>
-            <a:pPr indent="-310832" lvl="1" marL="914400" rtl="0" algn="l">
-              <a:lnSpc>
-                <a:spcPct val="200000"/>
-              </a:lnSpc>
-              <a:spcBef>
-                <a:spcPts val="0"/>
-              </a:spcBef>
-              <a:spcAft>
-                <a:spcPts val="0"/>
-              </a:spcAft>
-              <a:buClr>
-                <a:schemeClr val="accent1"/>
-              </a:buClr>
-              <a:buSzPct val="100000"/>
-              <a:buChar char="○"/>
-            </a:pPr>
-            <a:r>
-              <a:rPr b="1" lang="en">
-                <a:solidFill>
-                  <a:schemeClr val="accent1"/>
-                </a:solidFill>
-              </a:rPr>
-              <a:t>Incremental </a:t>
-            </a:r>
-            <a:r>
-              <a:rPr b="1" lang="en">
-                <a:solidFill>
-                  <a:schemeClr val="accent1"/>
-                </a:solidFill>
-              </a:rPr>
-              <a:t>sorting (merge sort) avoids re-sorting the entire collection after every line.</a:t>
-            </a:r>
-            <a:endParaRPr b="1">
-              <a:solidFill>
-                <a:schemeClr val="accent1"/>
-              </a:solidFill>
-            </a:endParaRPr>
-          </a:p>
         </p:txBody>
       </p:sp>
       <p:sp>
         <p:nvSpPr>
-          <p:cNvPr id="284" name="Google Shape;284;p41"/>
+          <p:cNvPr id="283" name="Google Shape;283;p41"/>
           <p:cNvSpPr txBox="1"/>
           <p:nvPr>
             <p:ph idx="12" type="sldNum"/>
@@ -15391,7 +15572,7 @@
   <p:cSld>
     <p:spTree>
       <p:nvGrpSpPr>
-        <p:cNvPr id="288" name="Shape 288"/>
+        <p:cNvPr id="287" name="Shape 287"/>
         <p:cNvGrpSpPr/>
         <p:nvPr/>
       </p:nvGrpSpPr>
@@ -15405,7 +15586,7 @@
       </p:grpSpPr>
       <p:sp>
         <p:nvSpPr>
-          <p:cNvPr id="289" name="Google Shape;289;p42"/>
+          <p:cNvPr id="288" name="Google Shape;288;p42"/>
           <p:cNvSpPr txBox="1"/>
           <p:nvPr>
             <p:ph type="title"/>
@@ -15413,20 +15594,20 @@
         </p:nvSpPr>
         <p:spPr>
           <a:xfrm>
-            <a:off x="773700" y="1806450"/>
-            <a:ext cx="7596600" cy="1530600"/>
+            <a:off x="311700" y="315925"/>
+            <a:ext cx="8520600" cy="831300"/>
           </a:xfrm>
           <a:prstGeom prst="rect">
             <a:avLst/>
           </a:prstGeom>
         </p:spPr>
         <p:txBody>
-          <a:bodyPr anchorCtr="0" anchor="ctr" bIns="91425" lIns="91425" spcFirstLastPara="1" rIns="91425" wrap="square" tIns="91425">
+          <a:bodyPr anchorCtr="0" anchor="b" bIns="91425" lIns="91425" spcFirstLastPara="1" rIns="91425" wrap="square" tIns="91425">
             <a:normAutofit/>
           </a:bodyPr>
           <a:lstStyle/>
           <a:p>
-            <a:pPr indent="0" lvl="0" marL="0" rtl="0" algn="ctr">
+            <a:pPr indent="0" lvl="0" marL="0" rtl="0" algn="l">
               <a:spcBef>
                 <a:spcPts val="0"/>
               </a:spcBef>
@@ -15441,7 +15622,70 @@
                   <a:schemeClr val="accent1"/>
                 </a:solidFill>
               </a:rPr>
-              <a:t>Thus, we chose</a:t>
+              <a:t>Architectural Rationale - </a:t>
+            </a:r>
+            <a:r>
+              <a:rPr b="1" lang="en">
+                <a:solidFill>
+                  <a:srgbClr val="F1C232"/>
+                </a:solidFill>
+              </a:rPr>
+              <a:t>Performance</a:t>
+            </a:r>
+            <a:endParaRPr b="1">
+              <a:solidFill>
+                <a:srgbClr val="F1C232"/>
+              </a:solidFill>
+            </a:endParaRPr>
+          </a:p>
+        </p:txBody>
+      </p:sp>
+      <p:sp>
+        <p:nvSpPr>
+          <p:cNvPr id="289" name="Google Shape;289;p42"/>
+          <p:cNvSpPr txBox="1"/>
+          <p:nvPr>
+            <p:ph idx="1" type="body"/>
+          </p:nvPr>
+        </p:nvSpPr>
+        <p:spPr>
+          <a:xfrm>
+            <a:off x="311700" y="1225225"/>
+            <a:ext cx="8272200" cy="3577200"/>
+          </a:xfrm>
+          <a:prstGeom prst="rect">
+            <a:avLst/>
+          </a:prstGeom>
+        </p:spPr>
+        <p:txBody>
+          <a:bodyPr anchorCtr="0" anchor="t" bIns="91425" lIns="91425" spcFirstLastPara="1" rIns="91425" wrap="square" tIns="91425">
+            <a:normAutofit fontScale="92500" lnSpcReduction="20000"/>
+          </a:bodyPr>
+          <a:lstStyle/>
+          <a:p>
+            <a:pPr indent="-334328" lvl="0" marL="457200" rtl="0" algn="l">
+              <a:lnSpc>
+                <a:spcPct val="200000"/>
+              </a:lnSpc>
+              <a:spcBef>
+                <a:spcPts val="0"/>
+              </a:spcBef>
+              <a:spcAft>
+                <a:spcPts val="0"/>
+              </a:spcAft>
+              <a:buClr>
+                <a:schemeClr val="accent1"/>
+              </a:buClr>
+              <a:buSzPct val="100000"/>
+              <a:buChar char="●"/>
+            </a:pPr>
+            <a:r>
+              <a:rPr lang="en">
+                <a:solidFill>
+                  <a:schemeClr val="accent1"/>
+                </a:solidFill>
+              </a:rPr>
+              <a:t>Space</a:t>
             </a:r>
             <a:endParaRPr>
               <a:solidFill>
@@ -15450,14 +15694,114 @@
             </a:endParaRPr>
           </a:p>
           <a:p>
-            <a:pPr indent="0" lvl="0" marL="0" rtl="0" algn="ctr">
-              <a:spcBef>
-                <a:spcPts val="0"/>
-              </a:spcBef>
-              <a:spcAft>
-                <a:spcPts val="0"/>
-              </a:spcAft>
-              <a:buNone/>
+            <a:pPr indent="-310832" lvl="1" marL="914400" rtl="0" algn="l">
+              <a:lnSpc>
+                <a:spcPct val="200000"/>
+              </a:lnSpc>
+              <a:spcBef>
+                <a:spcPts val="0"/>
+              </a:spcBef>
+              <a:spcAft>
+                <a:spcPts val="0"/>
+              </a:spcAft>
+              <a:buClr>
+                <a:schemeClr val="accent1"/>
+              </a:buClr>
+              <a:buSzPct val="100000"/>
+              <a:buChar char="○"/>
+            </a:pPr>
+            <a:r>
+              <a:rPr lang="en">
+                <a:solidFill>
+                  <a:schemeClr val="accent1"/>
+                </a:solidFill>
+              </a:rPr>
+              <a:t>Alphabetizer must retain previously alphabetized shifts for global ordering.</a:t>
+            </a:r>
+            <a:endParaRPr>
+              <a:solidFill>
+                <a:schemeClr val="accent1"/>
+              </a:solidFill>
+            </a:endParaRPr>
+          </a:p>
+          <a:p>
+            <a:pPr indent="-310832" lvl="2" marL="1371600" rtl="0" algn="l">
+              <a:lnSpc>
+                <a:spcPct val="200000"/>
+              </a:lnSpc>
+              <a:spcBef>
+                <a:spcPts val="0"/>
+              </a:spcBef>
+              <a:spcAft>
+                <a:spcPts val="0"/>
+              </a:spcAft>
+              <a:buClr>
+                <a:schemeClr val="accent1"/>
+              </a:buClr>
+              <a:buSzPct val="100000"/>
+              <a:buChar char="■"/>
+            </a:pPr>
+            <a:r>
+              <a:rPr lang="en">
+                <a:solidFill>
+                  <a:schemeClr val="accent1"/>
+                </a:solidFill>
+              </a:rPr>
+              <a:t>Shift storage can therefore grow with the total number of circular shifts.</a:t>
+            </a:r>
+            <a:endParaRPr>
+              <a:solidFill>
+                <a:schemeClr val="accent1"/>
+              </a:solidFill>
+            </a:endParaRPr>
+          </a:p>
+          <a:p>
+            <a:pPr indent="-310832" lvl="1" marL="914400" rtl="0" algn="l">
+              <a:lnSpc>
+                <a:spcPct val="200000"/>
+              </a:lnSpc>
+              <a:spcBef>
+                <a:spcPts val="0"/>
+              </a:spcBef>
+              <a:spcAft>
+                <a:spcPts val="0"/>
+              </a:spcAft>
+              <a:buClr>
+                <a:schemeClr val="accent1"/>
+              </a:buClr>
+              <a:buSzPct val="100000"/>
+              <a:buChar char="○"/>
+            </a:pPr>
+            <a:r>
+              <a:rPr lang="en">
+                <a:solidFill>
+                  <a:schemeClr val="accent1"/>
+                </a:solidFill>
+              </a:rPr>
+              <a:t>Different components need individual copies of data.</a:t>
+            </a:r>
+            <a:endParaRPr>
+              <a:solidFill>
+                <a:schemeClr val="accent1"/>
+              </a:solidFill>
+            </a:endParaRPr>
+          </a:p>
+          <a:p>
+            <a:pPr indent="-310832" lvl="1" marL="914400" rtl="0" algn="l">
+              <a:lnSpc>
+                <a:spcPct val="200000"/>
+              </a:lnSpc>
+              <a:spcBef>
+                <a:spcPts val="0"/>
+              </a:spcBef>
+              <a:spcAft>
+                <a:spcPts val="0"/>
+              </a:spcAft>
+              <a:buClr>
+                <a:schemeClr val="accent1"/>
+              </a:buClr>
+              <a:buSzPct val="100000"/>
+              <a:buChar char="○"/>
             </a:pPr>
             <a:r>
               <a:rPr b="1" lang="en">
@@ -15465,7 +15809,139 @@
                   <a:schemeClr val="accent1"/>
                 </a:solidFill>
               </a:rPr>
-              <a:t>Abstract Data Type Architecture</a:t>
+              <a:t>Nowadays, memory is relatively abundant, making this space cost less significant.</a:t>
+            </a:r>
+            <a:endParaRPr b="1">
+              <a:solidFill>
+                <a:schemeClr val="accent1"/>
+              </a:solidFill>
+            </a:endParaRPr>
+          </a:p>
+          <a:p>
+            <a:pPr indent="-334328" lvl="0" marL="457200" rtl="0" algn="l">
+              <a:lnSpc>
+                <a:spcPct val="200000"/>
+              </a:lnSpc>
+              <a:spcBef>
+                <a:spcPts val="0"/>
+              </a:spcBef>
+              <a:spcAft>
+                <a:spcPts val="0"/>
+              </a:spcAft>
+              <a:buClr>
+                <a:schemeClr val="accent1"/>
+              </a:buClr>
+              <a:buSzPct val="100000"/>
+              <a:buChar char="●"/>
+            </a:pPr>
+            <a:r>
+              <a:rPr lang="en">
+                <a:solidFill>
+                  <a:schemeClr val="accent1"/>
+                </a:solidFill>
+              </a:rPr>
+              <a:t>Response Time</a:t>
+            </a:r>
+            <a:endParaRPr>
+              <a:solidFill>
+                <a:schemeClr val="accent1"/>
+              </a:solidFill>
+            </a:endParaRPr>
+          </a:p>
+          <a:p>
+            <a:pPr indent="-310832" lvl="1" marL="914400" rtl="0" algn="l">
+              <a:lnSpc>
+                <a:spcPct val="200000"/>
+              </a:lnSpc>
+              <a:spcBef>
+                <a:spcPts val="0"/>
+              </a:spcBef>
+              <a:spcAft>
+                <a:spcPts val="0"/>
+              </a:spcAft>
+              <a:buClr>
+                <a:schemeClr val="accent1"/>
+              </a:buClr>
+              <a:buSzPct val="100000"/>
+              <a:buChar char="○"/>
+            </a:pPr>
+            <a:r>
+              <a:rPr lang="en">
+                <a:solidFill>
+                  <a:schemeClr val="accent1"/>
+                </a:solidFill>
+              </a:rPr>
+              <a:t>Data copying in different components cost time.</a:t>
+            </a:r>
+            <a:endParaRPr>
+              <a:solidFill>
+                <a:schemeClr val="accent1"/>
+              </a:solidFill>
+            </a:endParaRPr>
+          </a:p>
+          <a:p>
+            <a:pPr indent="-310832" lvl="1" marL="914400" rtl="0" algn="l">
+              <a:lnSpc>
+                <a:spcPct val="200000"/>
+              </a:lnSpc>
+              <a:spcBef>
+                <a:spcPts val="0"/>
+              </a:spcBef>
+              <a:spcAft>
+                <a:spcPts val="0"/>
+              </a:spcAft>
+              <a:buClr>
+                <a:schemeClr val="accent1"/>
+              </a:buClr>
+              <a:buSzPct val="100000"/>
+              <a:buChar char="○"/>
+            </a:pPr>
+            <a:r>
+              <a:rPr b="1" lang="en">
+                <a:solidFill>
+                  <a:schemeClr val="accent1"/>
+                </a:solidFill>
+              </a:rPr>
+              <a:t>Incremental processing saves time by using RAM instead of hard drives.</a:t>
+            </a:r>
+            <a:endParaRPr b="1">
+              <a:solidFill>
+                <a:schemeClr val="accent1"/>
+              </a:solidFill>
+            </a:endParaRPr>
+          </a:p>
+          <a:p>
+            <a:pPr indent="-310832" lvl="1" marL="914400" rtl="0" algn="l">
+              <a:lnSpc>
+                <a:spcPct val="200000"/>
+              </a:lnSpc>
+              <a:spcBef>
+                <a:spcPts val="0"/>
+              </a:spcBef>
+              <a:spcAft>
+                <a:spcPts val="0"/>
+              </a:spcAft>
+              <a:buClr>
+                <a:schemeClr val="accent1"/>
+              </a:buClr>
+              <a:buSzPct val="100000"/>
+              <a:buChar char="○"/>
+            </a:pPr>
+            <a:r>
+              <a:rPr b="1" lang="en">
+                <a:solidFill>
+                  <a:schemeClr val="accent1"/>
+                </a:solidFill>
+              </a:rPr>
+              <a:t>Incremental </a:t>
+            </a:r>
+            <a:r>
+              <a:rPr b="1" lang="en">
+                <a:solidFill>
+                  <a:schemeClr val="accent1"/>
+                </a:solidFill>
+              </a:rPr>
+              <a:t>sorting (merge sort) avoids re-sorting the entire collection after every line.</a:t>
             </a:r>
             <a:endParaRPr b="1">
               <a:solidFill>
@@ -15545,13 +16021,13 @@
           <p:cNvPr id="295" name="Google Shape;295;p43"/>
           <p:cNvSpPr txBox="1"/>
           <p:nvPr>
-            <p:ph idx="12" type="sldNum"/>
+            <p:ph type="title"/>
           </p:nvPr>
         </p:nvSpPr>
         <p:spPr>
           <a:xfrm>
-            <a:off x="8472458" y="4663217"/>
-            <a:ext cx="548700" cy="393600"/>
+            <a:off x="773700" y="1806450"/>
+            <a:ext cx="7596600" cy="1530600"/>
           </a:xfrm>
           <a:prstGeom prst="rect">
             <a:avLst/>
@@ -15563,6 +16039,78 @@
           </a:bodyPr>
           <a:lstStyle/>
           <a:p>
+            <a:pPr indent="0" lvl="0" marL="0" rtl="0" algn="ctr">
+              <a:spcBef>
+                <a:spcPts val="0"/>
+              </a:spcBef>
+              <a:spcAft>
+                <a:spcPts val="0"/>
+              </a:spcAft>
+              <a:buNone/>
+            </a:pPr>
+            <a:r>
+              <a:rPr lang="en">
+                <a:solidFill>
+                  <a:schemeClr val="accent1"/>
+                </a:solidFill>
+              </a:rPr>
+              <a:t>Thus, we chose</a:t>
+            </a:r>
+            <a:endParaRPr>
+              <a:solidFill>
+                <a:schemeClr val="accent1"/>
+              </a:solidFill>
+            </a:endParaRPr>
+          </a:p>
+          <a:p>
+            <a:pPr indent="0" lvl="0" marL="0" rtl="0" algn="ctr">
+              <a:spcBef>
+                <a:spcPts val="0"/>
+              </a:spcBef>
+              <a:spcAft>
+                <a:spcPts val="0"/>
+              </a:spcAft>
+              <a:buNone/>
+            </a:pPr>
+            <a:r>
+              <a:rPr b="1" lang="en">
+                <a:solidFill>
+                  <a:schemeClr val="accent1"/>
+                </a:solidFill>
+              </a:rPr>
+              <a:t>Abstract Data Type Architecture</a:t>
+            </a:r>
+            <a:endParaRPr b="1">
+              <a:solidFill>
+                <a:schemeClr val="accent1"/>
+              </a:solidFill>
+            </a:endParaRPr>
+          </a:p>
+        </p:txBody>
+      </p:sp>
+      <p:sp>
+        <p:nvSpPr>
+          <p:cNvPr id="296" name="Google Shape;296;p43"/>
+          <p:cNvSpPr txBox="1"/>
+          <p:nvPr>
+            <p:ph idx="12" type="sldNum"/>
+          </p:nvPr>
+        </p:nvSpPr>
+        <p:spPr>
+          <a:xfrm>
+            <a:off x="8472458" y="4663217"/>
+            <a:ext cx="548700" cy="393600"/>
+          </a:xfrm>
+          <a:prstGeom prst="rect">
+            <a:avLst/>
+          </a:prstGeom>
+        </p:spPr>
+        <p:txBody>
+          <a:bodyPr anchorCtr="0" anchor="ctr" bIns="91425" lIns="91425" spcFirstLastPara="1" rIns="91425" wrap="square" tIns="91425">
+            <a:normAutofit/>
+          </a:bodyPr>
+          <a:lstStyle/>
+          <a:p>
             <a:pPr indent="0" lvl="0" marL="0" rtl="0" algn="r">
               <a:spcBef>
                 <a:spcPts val="0"/>
@@ -15580,33 +16128,6 @@
           </a:p>
         </p:txBody>
       </p:sp>
-      <p:pic>
-        <p:nvPicPr>
-          <p:cNvPr id="296" name="Google Shape;296;p43" title="QuickdexDesign.png"/>
-          <p:cNvPicPr preferRelativeResize="0"/>
-          <p:nvPr/>
-        </p:nvPicPr>
-        <p:blipFill rotWithShape="1">
-          <a:blip r:embed="rId3">
-            <a:alphaModFix/>
-          </a:blip>
-          <a:srcRect b="0" l="219" r="219" t="0"/>
-          <a:stretch/>
-        </p:blipFill>
-        <p:spPr>
-          <a:xfrm>
-            <a:off x="578925" y="777988"/>
-            <a:ext cx="7986150" cy="3587523"/>
-          </a:xfrm>
-          <a:prstGeom prst="rect">
-            <a:avLst/>
-          </a:prstGeom>
-          <a:noFill/>
-          <a:ln>
-            <a:noFill/>
-          </a:ln>
-        </p:spPr>
-      </p:pic>
     </p:spTree>
   </p:cSld>
   <p:clrMapOvr>
@@ -15637,20 +16158,20 @@
           <p:cNvPr id="301" name="Google Shape;301;p44"/>
           <p:cNvSpPr txBox="1"/>
           <p:nvPr>
-            <p:ph type="ctrTitle"/>
+            <p:ph type="title"/>
           </p:nvPr>
         </p:nvSpPr>
         <p:spPr>
           <a:xfrm>
-            <a:off x="3044700" y="1444255"/>
-            <a:ext cx="3054600" cy="1537200"/>
+            <a:off x="773700" y="1806450"/>
+            <a:ext cx="7596600" cy="1530600"/>
           </a:xfrm>
           <a:prstGeom prst="rect">
             <a:avLst/>
           </a:prstGeom>
         </p:spPr>
         <p:txBody>
-          <a:bodyPr anchorCtr="0" anchor="b" bIns="91425" lIns="91425" spcFirstLastPara="1" rIns="91425" wrap="square" tIns="91425">
+          <a:bodyPr anchorCtr="0" anchor="ctr" bIns="91425" lIns="91425" spcFirstLastPara="1" rIns="91425" wrap="square" tIns="91425">
             <a:normAutofit/>
           </a:bodyPr>
           <a:lstStyle/>
@@ -15670,11 +16191,43 @@
                   <a:schemeClr val="accent1"/>
                 </a:solidFill>
               </a:rPr>
-              <a:t>Thank You</a:t>
+              <a:t>We are done with the </a:t>
+            </a:r>
+            <a:r>
+              <a:rPr b="1" lang="en">
+                <a:solidFill>
+                  <a:schemeClr val="accent1"/>
+                </a:solidFill>
+              </a:rPr>
+              <a:t>KWIC System</a:t>
+            </a:r>
+            <a:endParaRPr b="1">
+              <a:solidFill>
+                <a:schemeClr val="accent1"/>
+              </a:solidFill>
+            </a:endParaRPr>
+          </a:p>
+          <a:p>
+            <a:pPr indent="0" lvl="0" marL="0" rtl="0" algn="ctr">
+              <a:spcBef>
+                <a:spcPts val="0"/>
+              </a:spcBef>
+              <a:spcAft>
+                <a:spcPts val="0"/>
+              </a:spcAft>
+              <a:buNone/>
+            </a:pPr>
+            <a:r>
+              <a:rPr lang="en">
+                <a:solidFill>
+                  <a:schemeClr val="lt1"/>
+                </a:solidFill>
+              </a:rPr>
+              <a:t>Now we need the Search Engine</a:t>
             </a:r>
             <a:endParaRPr>
               <a:solidFill>
-                <a:schemeClr val="accent1"/>
+                <a:schemeClr val="lt1"/>
               </a:solidFill>
             </a:endParaRPr>
           </a:p>
@@ -15755,7 +16308,152 @@
         </p:nvSpPr>
         <p:spPr>
           <a:xfrm>
-            <a:off x="311700" y="108375"/>
+            <a:off x="773700" y="1806450"/>
+            <a:ext cx="7596600" cy="1530600"/>
+          </a:xfrm>
+          <a:prstGeom prst="rect">
+            <a:avLst/>
+          </a:prstGeom>
+        </p:spPr>
+        <p:txBody>
+          <a:bodyPr anchorCtr="0" anchor="ctr" bIns="91425" lIns="91425" spcFirstLastPara="1" rIns="91425" wrap="square" tIns="91425">
+            <a:normAutofit/>
+          </a:bodyPr>
+          <a:lstStyle/>
+          <a:p>
+            <a:pPr indent="0" lvl="0" marL="0" rtl="0" algn="ctr">
+              <a:spcBef>
+                <a:spcPts val="0"/>
+              </a:spcBef>
+              <a:spcAft>
+                <a:spcPts val="0"/>
+              </a:spcAft>
+              <a:buNone/>
+            </a:pPr>
+            <a:r>
+              <a:rPr lang="en">
+                <a:solidFill>
+                  <a:schemeClr val="accent1"/>
+                </a:solidFill>
+              </a:rPr>
+              <a:t>We are done with the KWIC System</a:t>
+            </a:r>
+            <a:endParaRPr>
+              <a:solidFill>
+                <a:schemeClr val="accent1"/>
+              </a:solidFill>
+            </a:endParaRPr>
+          </a:p>
+          <a:p>
+            <a:pPr indent="0" lvl="0" marL="0" rtl="0" algn="ctr">
+              <a:spcBef>
+                <a:spcPts val="0"/>
+              </a:spcBef>
+              <a:spcAft>
+                <a:spcPts val="0"/>
+              </a:spcAft>
+              <a:buNone/>
+            </a:pPr>
+            <a:r>
+              <a:rPr lang="en">
+                <a:solidFill>
+                  <a:schemeClr val="accent1"/>
+                </a:solidFill>
+              </a:rPr>
+              <a:t>Now we need the </a:t>
+            </a:r>
+            <a:r>
+              <a:rPr b="1" lang="en">
+                <a:solidFill>
+                  <a:schemeClr val="accent1"/>
+                </a:solidFill>
+              </a:rPr>
+              <a:t>Search Engine</a:t>
+            </a:r>
+            <a:endParaRPr b="1">
+              <a:solidFill>
+                <a:schemeClr val="accent1"/>
+              </a:solidFill>
+            </a:endParaRPr>
+          </a:p>
+        </p:txBody>
+      </p:sp>
+      <p:sp>
+        <p:nvSpPr>
+          <p:cNvPr id="308" name="Google Shape;308;p45"/>
+          <p:cNvSpPr txBox="1"/>
+          <p:nvPr>
+            <p:ph idx="12" type="sldNum"/>
+          </p:nvPr>
+        </p:nvSpPr>
+        <p:spPr>
+          <a:xfrm>
+            <a:off x="8472458" y="4663217"/>
+            <a:ext cx="548700" cy="393600"/>
+          </a:xfrm>
+          <a:prstGeom prst="rect">
+            <a:avLst/>
+          </a:prstGeom>
+        </p:spPr>
+        <p:txBody>
+          <a:bodyPr anchorCtr="0" anchor="ctr" bIns="91425" lIns="91425" spcFirstLastPara="1" rIns="91425" wrap="square" tIns="91425">
+            <a:normAutofit/>
+          </a:bodyPr>
+          <a:lstStyle/>
+          <a:p>
+            <a:pPr indent="0" lvl="0" marL="0" rtl="0" algn="r">
+              <a:spcBef>
+                <a:spcPts val="0"/>
+              </a:spcBef>
+              <a:spcAft>
+                <a:spcPts val="0"/>
+              </a:spcAft>
+              <a:buNone/>
+            </a:pPr>
+            <a:fld id="{00000000-1234-1234-1234-123412341234}" type="slidenum">
+              <a:rPr lang="en"/>
+              <a:t>‹#›</a:t>
+            </a:fld>
+            <a:endParaRPr/>
+          </a:p>
+        </p:txBody>
+      </p:sp>
+    </p:spTree>
+  </p:cSld>
+  <p:clrMapOvr>
+    <a:masterClrMapping/>
+  </p:clrMapOvr>
+</p:sld>
+</file>
+
+<file path=ppt/slides/slide34.xml><?xml version="1.0" encoding="utf-8"?>
+<p:sld xmlns:a="http://schemas.openxmlformats.org/drawingml/2006/main" xmlns:r="http://schemas.openxmlformats.org/officeDocument/2006/relationships" xmlns:mc="http://schemas.openxmlformats.org/markup-compatibility/2006" xmlns:mv="urn:schemas-microsoft-com:mac:vml" xmlns:p="http://schemas.openxmlformats.org/presentationml/2006/main" xmlns:c="http://schemas.openxmlformats.org/drawingml/2006/chart" xmlns:dgm="http://schemas.openxmlformats.org/drawingml/2006/diagram" xmlns:o="urn:schemas-microsoft-com:office:office" xmlns:v="urn:schemas-microsoft-com:vml" xmlns:pvml="urn:schemas-microsoft-com:office:powerpoint" xmlns:com="http://schemas.openxmlformats.org/drawingml/2006/compatibility" xmlns:p14="http://schemas.microsoft.com/office/powerpoint/2010/main" xmlns:p15="http://schemas.microsoft.com/office/powerpoint/2012/main" xmlns:ahyp="http://schemas.microsoft.com/office/drawing/2018/hyperlinkcolor">
+  <p:cSld>
+    <p:spTree>
+      <p:nvGrpSpPr>
+        <p:cNvPr id="312" name="Shape 312"/>
+        <p:cNvGrpSpPr/>
+        <p:nvPr/>
+      </p:nvGrpSpPr>
+      <p:grpSpPr>
+        <a:xfrm>
+          <a:off x="0" y="0"/>
+          <a:ext cx="0" cy="0"/>
+          <a:chOff x="0" y="0"/>
+          <a:chExt cx="0" cy="0"/>
+        </a:xfrm>
+      </p:grpSpPr>
+      <p:sp>
+        <p:nvSpPr>
+          <p:cNvPr id="313" name="Google Shape;313;p46"/>
+          <p:cNvSpPr txBox="1"/>
+          <p:nvPr>
+            <p:ph type="title"/>
+          </p:nvPr>
+        </p:nvSpPr>
+        <p:spPr>
+          <a:xfrm>
+            <a:off x="311700" y="315925"/>
             <a:ext cx="8520600" cy="831300"/>
           </a:xfrm>
           <a:prstGeom prst="rect">
@@ -15778,6 +16476,706 @@
               <a:buNone/>
             </a:pPr>
             <a:r>
+              <a:rPr lang="en">
+                <a:solidFill>
+                  <a:schemeClr val="accent1"/>
+                </a:solidFill>
+              </a:rPr>
+              <a:t>Search Engine</a:t>
+            </a:r>
+            <a:endParaRPr b="1">
+              <a:solidFill>
+                <a:srgbClr val="188038"/>
+              </a:solidFill>
+            </a:endParaRPr>
+          </a:p>
+        </p:txBody>
+      </p:sp>
+      <p:sp>
+        <p:nvSpPr>
+          <p:cNvPr id="314" name="Google Shape;314;p46"/>
+          <p:cNvSpPr txBox="1"/>
+          <p:nvPr>
+            <p:ph idx="1" type="body"/>
+          </p:nvPr>
+        </p:nvSpPr>
+        <p:spPr>
+          <a:xfrm>
+            <a:off x="311700" y="1225225"/>
+            <a:ext cx="8272200" cy="3577200"/>
+          </a:xfrm>
+          <a:prstGeom prst="rect">
+            <a:avLst/>
+          </a:prstGeom>
+        </p:spPr>
+        <p:txBody>
+          <a:bodyPr anchorCtr="0" anchor="t" bIns="91425" lIns="91425" spcFirstLastPara="1" rIns="91425" wrap="square" tIns="91425">
+            <a:normAutofit/>
+          </a:bodyPr>
+          <a:lstStyle/>
+          <a:p>
+            <a:pPr indent="-342900" lvl="0" marL="457200" rtl="0" algn="l">
+              <a:lnSpc>
+                <a:spcPct val="200000"/>
+              </a:lnSpc>
+              <a:spcBef>
+                <a:spcPts val="0"/>
+              </a:spcBef>
+              <a:spcAft>
+                <a:spcPts val="0"/>
+              </a:spcAft>
+              <a:buClr>
+                <a:schemeClr val="accent1"/>
+              </a:buClr>
+              <a:buSzPts val="1800"/>
+              <a:buChar char="●"/>
+            </a:pPr>
+            <a:r>
+              <a:rPr lang="en">
+                <a:solidFill>
+                  <a:schemeClr val="accent1"/>
+                </a:solidFill>
+              </a:rPr>
+              <a:t>Three operations</a:t>
+            </a:r>
+            <a:endParaRPr>
+              <a:solidFill>
+                <a:schemeClr val="accent1"/>
+              </a:solidFill>
+            </a:endParaRPr>
+          </a:p>
+          <a:p>
+            <a:pPr indent="-317500" lvl="1" marL="914400" rtl="0" algn="l">
+              <a:lnSpc>
+                <a:spcPct val="200000"/>
+              </a:lnSpc>
+              <a:spcBef>
+                <a:spcPts val="0"/>
+              </a:spcBef>
+              <a:spcAft>
+                <a:spcPts val="0"/>
+              </a:spcAft>
+              <a:buClr>
+                <a:schemeClr val="accent1"/>
+              </a:buClr>
+              <a:buSzPts val="1400"/>
+              <a:buChar char="○"/>
+            </a:pPr>
+            <a:r>
+              <a:rPr lang="en">
+                <a:solidFill>
+                  <a:schemeClr val="accent1"/>
+                </a:solidFill>
+              </a:rPr>
+              <a:t>setSearchEngine()</a:t>
+            </a:r>
+            <a:endParaRPr>
+              <a:solidFill>
+                <a:schemeClr val="accent1"/>
+              </a:solidFill>
+            </a:endParaRPr>
+          </a:p>
+          <a:p>
+            <a:pPr indent="-317500" lvl="2" marL="1371600" rtl="0" algn="l">
+              <a:lnSpc>
+                <a:spcPct val="200000"/>
+              </a:lnSpc>
+              <a:spcBef>
+                <a:spcPts val="0"/>
+              </a:spcBef>
+              <a:spcAft>
+                <a:spcPts val="0"/>
+              </a:spcAft>
+              <a:buClr>
+                <a:schemeClr val="accent1"/>
+              </a:buClr>
+              <a:buSzPts val="1400"/>
+              <a:buChar char="■"/>
+            </a:pPr>
+            <a:r>
+              <a:rPr lang="en">
+                <a:solidFill>
+                  <a:schemeClr val="accent1"/>
+                </a:solidFill>
+              </a:rPr>
+              <a:t>Receives user input and the KWIC index.</a:t>
+            </a:r>
+            <a:endParaRPr>
+              <a:solidFill>
+                <a:schemeClr val="accent1"/>
+              </a:solidFill>
+            </a:endParaRPr>
+          </a:p>
+          <a:p>
+            <a:pPr indent="-317500" lvl="1" marL="914400" rtl="0" algn="l">
+              <a:lnSpc>
+                <a:spcPct val="200000"/>
+              </a:lnSpc>
+              <a:spcBef>
+                <a:spcPts val="0"/>
+              </a:spcBef>
+              <a:spcAft>
+                <a:spcPts val="0"/>
+              </a:spcAft>
+              <a:buClr>
+                <a:schemeClr val="accent1"/>
+              </a:buClr>
+              <a:buSzPts val="1400"/>
+              <a:buChar char="○"/>
+            </a:pPr>
+            <a:r>
+              <a:rPr lang="en">
+                <a:solidFill>
+                  <a:schemeClr val="accent1"/>
+                </a:solidFill>
+              </a:rPr>
+              <a:t>searchKeywordMatches()</a:t>
+            </a:r>
+            <a:endParaRPr>
+              <a:solidFill>
+                <a:schemeClr val="accent1"/>
+              </a:solidFill>
+            </a:endParaRPr>
+          </a:p>
+          <a:p>
+            <a:pPr indent="-317500" lvl="2" marL="1371600" rtl="0" algn="l">
+              <a:lnSpc>
+                <a:spcPct val="200000"/>
+              </a:lnSpc>
+              <a:spcBef>
+                <a:spcPts val="0"/>
+              </a:spcBef>
+              <a:spcAft>
+                <a:spcPts val="0"/>
+              </a:spcAft>
+              <a:buClr>
+                <a:schemeClr val="accent1"/>
+              </a:buClr>
+              <a:buSzPts val="1400"/>
+              <a:buChar char="■"/>
+            </a:pPr>
+            <a:r>
+              <a:rPr lang="en">
+                <a:solidFill>
+                  <a:schemeClr val="accent1"/>
+                </a:solidFill>
+              </a:rPr>
+              <a:t>Finds KWIC entries that matches user input.</a:t>
+            </a:r>
+            <a:endParaRPr>
+              <a:solidFill>
+                <a:schemeClr val="accent1"/>
+              </a:solidFill>
+            </a:endParaRPr>
+          </a:p>
+          <a:p>
+            <a:pPr indent="-317500" lvl="1" marL="914400" rtl="0" algn="l">
+              <a:lnSpc>
+                <a:spcPct val="200000"/>
+              </a:lnSpc>
+              <a:spcBef>
+                <a:spcPts val="0"/>
+              </a:spcBef>
+              <a:spcAft>
+                <a:spcPts val="0"/>
+              </a:spcAft>
+              <a:buClr>
+                <a:schemeClr val="accent1"/>
+              </a:buClr>
+              <a:buSzPts val="1400"/>
+              <a:buChar char="○"/>
+            </a:pPr>
+            <a:r>
+              <a:rPr lang="en">
+                <a:solidFill>
+                  <a:schemeClr val="accent1"/>
+                </a:solidFill>
+              </a:rPr>
+              <a:t>displayResults()</a:t>
+            </a:r>
+            <a:endParaRPr>
+              <a:solidFill>
+                <a:schemeClr val="accent1"/>
+              </a:solidFill>
+            </a:endParaRPr>
+          </a:p>
+          <a:p>
+            <a:pPr indent="-317500" lvl="2" marL="1371600" rtl="0" algn="l">
+              <a:lnSpc>
+                <a:spcPct val="200000"/>
+              </a:lnSpc>
+              <a:spcBef>
+                <a:spcPts val="0"/>
+              </a:spcBef>
+              <a:spcAft>
+                <a:spcPts val="0"/>
+              </a:spcAft>
+              <a:buClr>
+                <a:schemeClr val="accent1"/>
+              </a:buClr>
+              <a:buSzPts val="1400"/>
+              <a:buChar char="■"/>
+            </a:pPr>
+            <a:r>
+              <a:rPr lang="en">
+                <a:solidFill>
+                  <a:schemeClr val="accent1"/>
+                </a:solidFill>
+              </a:rPr>
+              <a:t>Displays the matching results to the user.</a:t>
+            </a:r>
+            <a:endParaRPr>
+              <a:solidFill>
+                <a:schemeClr val="accent1"/>
+              </a:solidFill>
+            </a:endParaRPr>
+          </a:p>
+        </p:txBody>
+      </p:sp>
+      <p:sp>
+        <p:nvSpPr>
+          <p:cNvPr id="315" name="Google Shape;315;p46"/>
+          <p:cNvSpPr txBox="1"/>
+          <p:nvPr>
+            <p:ph idx="12" type="sldNum"/>
+          </p:nvPr>
+        </p:nvSpPr>
+        <p:spPr>
+          <a:xfrm>
+            <a:off x="8472458" y="4663217"/>
+            <a:ext cx="548700" cy="393600"/>
+          </a:xfrm>
+          <a:prstGeom prst="rect">
+            <a:avLst/>
+          </a:prstGeom>
+        </p:spPr>
+        <p:txBody>
+          <a:bodyPr anchorCtr="0" anchor="ctr" bIns="91425" lIns="91425" spcFirstLastPara="1" rIns="91425" wrap="square" tIns="91425">
+            <a:normAutofit/>
+          </a:bodyPr>
+          <a:lstStyle/>
+          <a:p>
+            <a:pPr indent="0" lvl="0" marL="0" rtl="0" algn="r">
+              <a:spcBef>
+                <a:spcPts val="0"/>
+              </a:spcBef>
+              <a:spcAft>
+                <a:spcPts val="0"/>
+              </a:spcAft>
+              <a:buNone/>
+            </a:pPr>
+            <a:fld id="{00000000-1234-1234-1234-123412341234}" type="slidenum">
+              <a:rPr lang="en"/>
+              <a:t>‹#›</a:t>
+            </a:fld>
+            <a:endParaRPr/>
+          </a:p>
+        </p:txBody>
+      </p:sp>
+      <p:pic>
+        <p:nvPicPr>
+          <p:cNvPr id="316" name="Google Shape;316;p46" title="SearchEngine.png"/>
+          <p:cNvPicPr preferRelativeResize="0"/>
+          <p:nvPr/>
+        </p:nvPicPr>
+        <p:blipFill>
+          <a:blip r:embed="rId3">
+            <a:alphaModFix/>
+          </a:blip>
+          <a:stretch>
+            <a:fillRect/>
+          </a:stretch>
+        </p:blipFill>
+        <p:spPr>
+          <a:xfrm>
+            <a:off x="5611027" y="525191"/>
+            <a:ext cx="3154648" cy="3959726"/>
+          </a:xfrm>
+          <a:prstGeom prst="rect">
+            <a:avLst/>
+          </a:prstGeom>
+          <a:noFill/>
+          <a:ln>
+            <a:noFill/>
+          </a:ln>
+        </p:spPr>
+      </p:pic>
+    </p:spTree>
+  </p:cSld>
+  <p:clrMapOvr>
+    <a:masterClrMapping/>
+  </p:clrMapOvr>
+</p:sld>
+</file>
+
+<file path=ppt/slides/slide35.xml><?xml version="1.0" encoding="utf-8"?>
+<p:sld xmlns:a="http://schemas.openxmlformats.org/drawingml/2006/main" xmlns:r="http://schemas.openxmlformats.org/officeDocument/2006/relationships" xmlns:mc="http://schemas.openxmlformats.org/markup-compatibility/2006" xmlns:mv="urn:schemas-microsoft-com:mac:vml" xmlns:p="http://schemas.openxmlformats.org/presentationml/2006/main" xmlns:c="http://schemas.openxmlformats.org/drawingml/2006/chart" xmlns:dgm="http://schemas.openxmlformats.org/drawingml/2006/diagram" xmlns:o="urn:schemas-microsoft-com:office:office" xmlns:v="urn:schemas-microsoft-com:vml" xmlns:pvml="urn:schemas-microsoft-com:office:powerpoint" xmlns:com="http://schemas.openxmlformats.org/drawingml/2006/compatibility" xmlns:p14="http://schemas.microsoft.com/office/powerpoint/2010/main" xmlns:p15="http://schemas.microsoft.com/office/powerpoint/2012/main" xmlns:ahyp="http://schemas.microsoft.com/office/drawing/2018/hyperlinkcolor">
+  <p:cSld>
+    <p:spTree>
+      <p:nvGrpSpPr>
+        <p:cNvPr id="320" name="Shape 320"/>
+        <p:cNvGrpSpPr/>
+        <p:nvPr/>
+      </p:nvGrpSpPr>
+      <p:grpSpPr>
+        <a:xfrm>
+          <a:off x="0" y="0"/>
+          <a:ext cx="0" cy="0"/>
+          <a:chOff x="0" y="0"/>
+          <a:chExt cx="0" cy="0"/>
+        </a:xfrm>
+      </p:grpSpPr>
+      <p:sp>
+        <p:nvSpPr>
+          <p:cNvPr id="321" name="Google Shape;321;p47"/>
+          <p:cNvSpPr txBox="1"/>
+          <p:nvPr>
+            <p:ph type="title"/>
+          </p:nvPr>
+        </p:nvSpPr>
+        <p:spPr>
+          <a:xfrm>
+            <a:off x="773700" y="1806450"/>
+            <a:ext cx="7596600" cy="1530600"/>
+          </a:xfrm>
+          <a:prstGeom prst="rect">
+            <a:avLst/>
+          </a:prstGeom>
+        </p:spPr>
+        <p:txBody>
+          <a:bodyPr anchorCtr="0" anchor="ctr" bIns="91425" lIns="91425" spcFirstLastPara="1" rIns="91425" wrap="square" tIns="91425">
+            <a:normAutofit/>
+          </a:bodyPr>
+          <a:lstStyle/>
+          <a:p>
+            <a:pPr indent="0" lvl="0" marL="0" rtl="0" algn="ctr">
+              <a:spcBef>
+                <a:spcPts val="0"/>
+              </a:spcBef>
+              <a:spcAft>
+                <a:spcPts val="0"/>
+              </a:spcAft>
+              <a:buNone/>
+            </a:pPr>
+            <a:r>
+              <a:rPr lang="en">
+                <a:solidFill>
+                  <a:schemeClr val="accent1"/>
+                </a:solidFill>
+              </a:rPr>
+              <a:t>Our final architectural design diagram</a:t>
+            </a:r>
+            <a:endParaRPr b="1">
+              <a:solidFill>
+                <a:schemeClr val="accent1"/>
+              </a:solidFill>
+            </a:endParaRPr>
+          </a:p>
+        </p:txBody>
+      </p:sp>
+      <p:sp>
+        <p:nvSpPr>
+          <p:cNvPr id="322" name="Google Shape;322;p47"/>
+          <p:cNvSpPr txBox="1"/>
+          <p:nvPr>
+            <p:ph idx="12" type="sldNum"/>
+          </p:nvPr>
+        </p:nvSpPr>
+        <p:spPr>
+          <a:xfrm>
+            <a:off x="8472458" y="4663217"/>
+            <a:ext cx="548700" cy="393600"/>
+          </a:xfrm>
+          <a:prstGeom prst="rect">
+            <a:avLst/>
+          </a:prstGeom>
+        </p:spPr>
+        <p:txBody>
+          <a:bodyPr anchorCtr="0" anchor="ctr" bIns="91425" lIns="91425" spcFirstLastPara="1" rIns="91425" wrap="square" tIns="91425">
+            <a:normAutofit/>
+          </a:bodyPr>
+          <a:lstStyle/>
+          <a:p>
+            <a:pPr indent="0" lvl="0" marL="0" rtl="0" algn="r">
+              <a:spcBef>
+                <a:spcPts val="0"/>
+              </a:spcBef>
+              <a:spcAft>
+                <a:spcPts val="0"/>
+              </a:spcAft>
+              <a:buNone/>
+            </a:pPr>
+            <a:fld id="{00000000-1234-1234-1234-123412341234}" type="slidenum">
+              <a:rPr lang="en"/>
+              <a:t>‹#›</a:t>
+            </a:fld>
+            <a:endParaRPr/>
+          </a:p>
+        </p:txBody>
+      </p:sp>
+    </p:spTree>
+  </p:cSld>
+  <p:clrMapOvr>
+    <a:masterClrMapping/>
+  </p:clrMapOvr>
+</p:sld>
+</file>
+
+<file path=ppt/slides/slide36.xml><?xml version="1.0" encoding="utf-8"?>
+<p:sld xmlns:a="http://schemas.openxmlformats.org/drawingml/2006/main" xmlns:r="http://schemas.openxmlformats.org/officeDocument/2006/relationships" xmlns:mc="http://schemas.openxmlformats.org/markup-compatibility/2006" xmlns:mv="urn:schemas-microsoft-com:mac:vml" xmlns:p="http://schemas.openxmlformats.org/presentationml/2006/main" xmlns:c="http://schemas.openxmlformats.org/drawingml/2006/chart" xmlns:dgm="http://schemas.openxmlformats.org/drawingml/2006/diagram" xmlns:o="urn:schemas-microsoft-com:office:office" xmlns:v="urn:schemas-microsoft-com:vml" xmlns:pvml="urn:schemas-microsoft-com:office:powerpoint" xmlns:com="http://schemas.openxmlformats.org/drawingml/2006/compatibility" xmlns:p14="http://schemas.microsoft.com/office/powerpoint/2010/main" xmlns:p15="http://schemas.microsoft.com/office/powerpoint/2012/main" xmlns:ahyp="http://schemas.microsoft.com/office/drawing/2018/hyperlinkcolor">
+  <p:cSld>
+    <p:spTree>
+      <p:nvGrpSpPr>
+        <p:cNvPr id="326" name="Shape 326"/>
+        <p:cNvGrpSpPr/>
+        <p:nvPr/>
+      </p:nvGrpSpPr>
+      <p:grpSpPr>
+        <a:xfrm>
+          <a:off x="0" y="0"/>
+          <a:ext cx="0" cy="0"/>
+          <a:chOff x="0" y="0"/>
+          <a:chExt cx="0" cy="0"/>
+        </a:xfrm>
+      </p:grpSpPr>
+      <p:sp>
+        <p:nvSpPr>
+          <p:cNvPr id="327" name="Google Shape;327;p48"/>
+          <p:cNvSpPr txBox="1"/>
+          <p:nvPr>
+            <p:ph idx="12" type="sldNum"/>
+          </p:nvPr>
+        </p:nvSpPr>
+        <p:spPr>
+          <a:xfrm>
+            <a:off x="8472458" y="4663217"/>
+            <a:ext cx="548700" cy="393600"/>
+          </a:xfrm>
+          <a:prstGeom prst="rect">
+            <a:avLst/>
+          </a:prstGeom>
+        </p:spPr>
+        <p:txBody>
+          <a:bodyPr anchorCtr="0" anchor="ctr" bIns="91425" lIns="91425" spcFirstLastPara="1" rIns="91425" wrap="square" tIns="91425">
+            <a:normAutofit/>
+          </a:bodyPr>
+          <a:lstStyle/>
+          <a:p>
+            <a:pPr indent="0" lvl="0" marL="0" rtl="0" algn="r">
+              <a:spcBef>
+                <a:spcPts val="0"/>
+              </a:spcBef>
+              <a:spcAft>
+                <a:spcPts val="0"/>
+              </a:spcAft>
+              <a:buNone/>
+            </a:pPr>
+            <a:fld id="{00000000-1234-1234-1234-123412341234}" type="slidenum">
+              <a:rPr lang="en"/>
+              <a:t>‹#›</a:t>
+            </a:fld>
+            <a:endParaRPr/>
+          </a:p>
+        </p:txBody>
+      </p:sp>
+      <p:pic>
+        <p:nvPicPr>
+          <p:cNvPr id="328" name="Google Shape;328;p48" title="FinalQuickdexDesign.png"/>
+          <p:cNvPicPr preferRelativeResize="0"/>
+          <p:nvPr/>
+        </p:nvPicPr>
+        <p:blipFill rotWithShape="1">
+          <a:blip r:embed="rId3">
+            <a:alphaModFix/>
+          </a:blip>
+          <a:srcRect b="0" l="0" r="0" t="0"/>
+          <a:stretch/>
+        </p:blipFill>
+        <p:spPr>
+          <a:xfrm>
+            <a:off x="527963" y="822237"/>
+            <a:ext cx="8088074" cy="3499024"/>
+          </a:xfrm>
+          <a:prstGeom prst="rect">
+            <a:avLst/>
+          </a:prstGeom>
+          <a:noFill/>
+          <a:ln>
+            <a:noFill/>
+          </a:ln>
+        </p:spPr>
+      </p:pic>
+    </p:spTree>
+  </p:cSld>
+  <p:clrMapOvr>
+    <a:masterClrMapping/>
+  </p:clrMapOvr>
+</p:sld>
+</file>
+
+<file path=ppt/slides/slide37.xml><?xml version="1.0" encoding="utf-8"?>
+<p:sld xmlns:a="http://schemas.openxmlformats.org/drawingml/2006/main" xmlns:r="http://schemas.openxmlformats.org/officeDocument/2006/relationships" xmlns:mc="http://schemas.openxmlformats.org/markup-compatibility/2006" xmlns:mv="urn:schemas-microsoft-com:mac:vml" xmlns:p="http://schemas.openxmlformats.org/presentationml/2006/main" xmlns:c="http://schemas.openxmlformats.org/drawingml/2006/chart" xmlns:dgm="http://schemas.openxmlformats.org/drawingml/2006/diagram" xmlns:o="urn:schemas-microsoft-com:office:office" xmlns:v="urn:schemas-microsoft-com:vml" xmlns:pvml="urn:schemas-microsoft-com:office:powerpoint" xmlns:com="http://schemas.openxmlformats.org/drawingml/2006/compatibility" xmlns:p14="http://schemas.microsoft.com/office/powerpoint/2010/main" xmlns:p15="http://schemas.microsoft.com/office/powerpoint/2012/main" xmlns:ahyp="http://schemas.microsoft.com/office/drawing/2018/hyperlinkcolor">
+  <p:cSld>
+    <p:spTree>
+      <p:nvGrpSpPr>
+        <p:cNvPr id="332" name="Shape 332"/>
+        <p:cNvGrpSpPr/>
+        <p:nvPr/>
+      </p:nvGrpSpPr>
+      <p:grpSpPr>
+        <a:xfrm>
+          <a:off x="0" y="0"/>
+          <a:ext cx="0" cy="0"/>
+          <a:chOff x="0" y="0"/>
+          <a:chExt cx="0" cy="0"/>
+        </a:xfrm>
+      </p:grpSpPr>
+      <p:sp>
+        <p:nvSpPr>
+          <p:cNvPr id="333" name="Google Shape;333;p49"/>
+          <p:cNvSpPr txBox="1"/>
+          <p:nvPr>
+            <p:ph type="ctrTitle"/>
+          </p:nvPr>
+        </p:nvSpPr>
+        <p:spPr>
+          <a:xfrm>
+            <a:off x="3044700" y="1444255"/>
+            <a:ext cx="3054600" cy="1537200"/>
+          </a:xfrm>
+          <a:prstGeom prst="rect">
+            <a:avLst/>
+          </a:prstGeom>
+        </p:spPr>
+        <p:txBody>
+          <a:bodyPr anchorCtr="0" anchor="b" bIns="91425" lIns="91425" spcFirstLastPara="1" rIns="91425" wrap="square" tIns="91425">
+            <a:normAutofit/>
+          </a:bodyPr>
+          <a:lstStyle/>
+          <a:p>
+            <a:pPr indent="0" lvl="0" marL="0" rtl="0" algn="ctr">
+              <a:spcBef>
+                <a:spcPts val="0"/>
+              </a:spcBef>
+              <a:spcAft>
+                <a:spcPts val="0"/>
+              </a:spcAft>
+              <a:buNone/>
+            </a:pPr>
+            <a:r>
+              <a:rPr lang="en">
+                <a:solidFill>
+                  <a:schemeClr val="accent1"/>
+                </a:solidFill>
+              </a:rPr>
+              <a:t>Thank You</a:t>
+            </a:r>
+            <a:endParaRPr>
+              <a:solidFill>
+                <a:schemeClr val="accent1"/>
+              </a:solidFill>
+            </a:endParaRPr>
+          </a:p>
+        </p:txBody>
+      </p:sp>
+      <p:sp>
+        <p:nvSpPr>
+          <p:cNvPr id="334" name="Google Shape;334;p49"/>
+          <p:cNvSpPr txBox="1"/>
+          <p:nvPr>
+            <p:ph idx="12" type="sldNum"/>
+          </p:nvPr>
+        </p:nvSpPr>
+        <p:spPr>
+          <a:xfrm>
+            <a:off x="8472458" y="4663217"/>
+            <a:ext cx="548700" cy="393600"/>
+          </a:xfrm>
+          <a:prstGeom prst="rect">
+            <a:avLst/>
+          </a:prstGeom>
+        </p:spPr>
+        <p:txBody>
+          <a:bodyPr anchorCtr="0" anchor="ctr" bIns="91425" lIns="91425" spcFirstLastPara="1" rIns="91425" wrap="square" tIns="91425">
+            <a:normAutofit/>
+          </a:bodyPr>
+          <a:lstStyle/>
+          <a:p>
+            <a:pPr indent="0" lvl="0" marL="0" rtl="0" algn="r">
+              <a:spcBef>
+                <a:spcPts val="0"/>
+              </a:spcBef>
+              <a:spcAft>
+                <a:spcPts val="0"/>
+              </a:spcAft>
+              <a:buNone/>
+            </a:pPr>
+            <a:fld id="{00000000-1234-1234-1234-123412341234}" type="slidenum">
+              <a:rPr lang="en"/>
+              <a:t>‹#›</a:t>
+            </a:fld>
+            <a:endParaRPr/>
+          </a:p>
+        </p:txBody>
+      </p:sp>
+    </p:spTree>
+  </p:cSld>
+  <p:clrMapOvr>
+    <a:masterClrMapping/>
+  </p:clrMapOvr>
+</p:sld>
+</file>
+
+<file path=ppt/slides/slide38.xml><?xml version="1.0" encoding="utf-8"?>
+<p:sld xmlns:a="http://schemas.openxmlformats.org/drawingml/2006/main" xmlns:r="http://schemas.openxmlformats.org/officeDocument/2006/relationships" xmlns:mc="http://schemas.openxmlformats.org/markup-compatibility/2006" xmlns:mv="urn:schemas-microsoft-com:mac:vml" xmlns:p="http://schemas.openxmlformats.org/presentationml/2006/main" xmlns:c="http://schemas.openxmlformats.org/drawingml/2006/chart" xmlns:dgm="http://schemas.openxmlformats.org/drawingml/2006/diagram" xmlns:o="urn:schemas-microsoft-com:office:office" xmlns:v="urn:schemas-microsoft-com:vml" xmlns:pvml="urn:schemas-microsoft-com:office:powerpoint" xmlns:com="http://schemas.openxmlformats.org/drawingml/2006/compatibility" xmlns:p14="http://schemas.microsoft.com/office/powerpoint/2010/main" xmlns:p15="http://schemas.microsoft.com/office/powerpoint/2012/main" xmlns:ahyp="http://schemas.microsoft.com/office/drawing/2018/hyperlinkcolor">
+  <p:cSld>
+    <p:spTree>
+      <p:nvGrpSpPr>
+        <p:cNvPr id="338" name="Shape 338"/>
+        <p:cNvGrpSpPr/>
+        <p:nvPr/>
+      </p:nvGrpSpPr>
+      <p:grpSpPr>
+        <a:xfrm>
+          <a:off x="0" y="0"/>
+          <a:ext cx="0" cy="0"/>
+          <a:chOff x="0" y="0"/>
+          <a:chExt cx="0" cy="0"/>
+        </a:xfrm>
+      </p:grpSpPr>
+      <p:sp>
+        <p:nvSpPr>
+          <p:cNvPr id="339" name="Google Shape;339;p50"/>
+          <p:cNvSpPr txBox="1"/>
+          <p:nvPr>
+            <p:ph type="title"/>
+          </p:nvPr>
+        </p:nvSpPr>
+        <p:spPr>
+          <a:xfrm>
+            <a:off x="311700" y="108375"/>
+            <a:ext cx="8520600" cy="831300"/>
+          </a:xfrm>
+          <a:prstGeom prst="rect">
+            <a:avLst/>
+          </a:prstGeom>
+        </p:spPr>
+        <p:txBody>
+          <a:bodyPr anchorCtr="0" anchor="b" bIns="91425" lIns="91425" spcFirstLastPara="1" rIns="91425" wrap="square" tIns="91425">
+            <a:normAutofit/>
+          </a:bodyPr>
+          <a:lstStyle/>
+          <a:p>
+            <a:pPr indent="0" lvl="0" marL="0" rtl="0" algn="l">
+              <a:spcBef>
+                <a:spcPts val="0"/>
+              </a:spcBef>
+              <a:spcAft>
+                <a:spcPts val="0"/>
+              </a:spcAft>
+              <a:buNone/>
+            </a:pPr>
+            <a:r>
               <a:rPr lang="en"/>
               <a:t>References</a:t>
             </a:r>
@@ -15787,7 +17185,7 @@
       </p:sp>
       <p:sp>
         <p:nvSpPr>
-          <p:cNvPr id="308" name="Google Shape;308;p45"/>
+          <p:cNvPr id="340" name="Google Shape;340;p50"/>
           <p:cNvSpPr txBox="1"/>
           <p:nvPr>
             <p:ph idx="1" type="body"/>
@@ -15840,7 +17238,7 @@
       </p:sp>
       <p:sp>
         <p:nvSpPr>
-          <p:cNvPr id="309" name="Google Shape;309;p45"/>
+          <p:cNvPr id="341" name="Google Shape;341;p50"/>
           <p:cNvSpPr txBox="1"/>
           <p:nvPr>
             <p:ph idx="12" type="sldNum"/>
